--- a/selfx/output/submission/SELF_X_Presentation.pptx
+++ b/selfx/output/submission/SELF_X_Presentation.pptx
@@ -2,32 +2,32 @@
 <file path=ppt/presentation.xml><?xml version="1.0" encoding="utf-8"?>
 <p:presentation xmlns:p="http://schemas.openxmlformats.org/presentationml/2006/main">
   <p:sldMasterIdLst>
-    <p:sldMasterId xmlns:r="http://schemas.openxmlformats.org/officeDocument/2006/relationships" id="2147483648" r:id="R70e827b8c9984790"/>
+    <p:sldMasterId xmlns:r="http://schemas.openxmlformats.org/officeDocument/2006/relationships" id="2147483648" r:id="R994de382da304edf"/>
   </p:sldMasterIdLst>
   <p:notesMasterIdLst>
-    <p:notesMasterId xmlns:r="http://schemas.openxmlformats.org/officeDocument/2006/relationships" r:id="R62db5deb29674f61"/>
+    <p:notesMasterId xmlns:r="http://schemas.openxmlformats.org/officeDocument/2006/relationships" r:id="R11eb01b7cb0943e5"/>
   </p:notesMasterIdLst>
   <p:sldIdLst>
-    <p:sldId xmlns:r="http://schemas.openxmlformats.org/officeDocument/2006/relationships" id="256" r:id="Rc6c754ae47ad442e"/>
-    <p:sldId xmlns:r="http://schemas.openxmlformats.org/officeDocument/2006/relationships" id="257" r:id="R339ef200f8e84fb6"/>
-    <p:sldId xmlns:r="http://schemas.openxmlformats.org/officeDocument/2006/relationships" id="258" r:id="R5fe48b2697264a54"/>
-    <p:sldId xmlns:r="http://schemas.openxmlformats.org/officeDocument/2006/relationships" id="259" r:id="R1bf8ea015bb844bd"/>
-    <p:sldId xmlns:r="http://schemas.openxmlformats.org/officeDocument/2006/relationships" id="260" r:id="Ra5f1f3e307284533"/>
-    <p:sldId xmlns:r="http://schemas.openxmlformats.org/officeDocument/2006/relationships" id="261" r:id="R67602081537748ac"/>
-    <p:sldId xmlns:r="http://schemas.openxmlformats.org/officeDocument/2006/relationships" id="262" r:id="Rd72657a6ae8e4927"/>
-    <p:sldId xmlns:r="http://schemas.openxmlformats.org/officeDocument/2006/relationships" id="263" r:id="Ra336ba27f937481e"/>
-    <p:sldId xmlns:r="http://schemas.openxmlformats.org/officeDocument/2006/relationships" id="264" r:id="R0db8b19f44834fe5"/>
-    <p:sldId xmlns:r="http://schemas.openxmlformats.org/officeDocument/2006/relationships" id="265" r:id="R287cf0d5b2c545bb"/>
-    <p:sldId xmlns:r="http://schemas.openxmlformats.org/officeDocument/2006/relationships" id="266" r:id="R658a1d1d528f4fc5"/>
-    <p:sldId xmlns:r="http://schemas.openxmlformats.org/officeDocument/2006/relationships" id="267" r:id="R1c0df0a5816d45a2"/>
-    <p:sldId xmlns:r="http://schemas.openxmlformats.org/officeDocument/2006/relationships" id="268" r:id="R2939d8222e734314"/>
-    <p:sldId xmlns:r="http://schemas.openxmlformats.org/officeDocument/2006/relationships" id="269" r:id="R3a02ccd15fa64c43"/>
-    <p:sldId xmlns:r="http://schemas.openxmlformats.org/officeDocument/2006/relationships" id="270" r:id="Rd09a854464c842a2"/>
-    <p:sldId xmlns:r="http://schemas.openxmlformats.org/officeDocument/2006/relationships" id="271" r:id="R43eb003572104f75"/>
-    <p:sldId xmlns:r="http://schemas.openxmlformats.org/officeDocument/2006/relationships" id="272" r:id="R1ad1302851334607"/>
-    <p:sldId xmlns:r="http://schemas.openxmlformats.org/officeDocument/2006/relationships" id="273" r:id="R0077d24e86d446c7"/>
-    <p:sldId xmlns:r="http://schemas.openxmlformats.org/officeDocument/2006/relationships" id="274" r:id="Rf3e7a63abdf94f39"/>
-    <p:sldId xmlns:r="http://schemas.openxmlformats.org/officeDocument/2006/relationships" id="275" r:id="Rabe2bdcc51a546fd"/>
+    <p:sldId xmlns:r="http://schemas.openxmlformats.org/officeDocument/2006/relationships" id="256" r:id="R69b954914392481d"/>
+    <p:sldId xmlns:r="http://schemas.openxmlformats.org/officeDocument/2006/relationships" id="257" r:id="Rb1f31d6a5b214a29"/>
+    <p:sldId xmlns:r="http://schemas.openxmlformats.org/officeDocument/2006/relationships" id="258" r:id="Rd6c4088874ab4f87"/>
+    <p:sldId xmlns:r="http://schemas.openxmlformats.org/officeDocument/2006/relationships" id="259" r:id="R3dfd448d19994bfa"/>
+    <p:sldId xmlns:r="http://schemas.openxmlformats.org/officeDocument/2006/relationships" id="260" r:id="R3e52e47532f3458e"/>
+    <p:sldId xmlns:r="http://schemas.openxmlformats.org/officeDocument/2006/relationships" id="261" r:id="R57aca64da41148eb"/>
+    <p:sldId xmlns:r="http://schemas.openxmlformats.org/officeDocument/2006/relationships" id="262" r:id="R5e4d3b75933e471e"/>
+    <p:sldId xmlns:r="http://schemas.openxmlformats.org/officeDocument/2006/relationships" id="263" r:id="R8c29d7df213d4690"/>
+    <p:sldId xmlns:r="http://schemas.openxmlformats.org/officeDocument/2006/relationships" id="264" r:id="R3a11b33bd22d4b5a"/>
+    <p:sldId xmlns:r="http://schemas.openxmlformats.org/officeDocument/2006/relationships" id="265" r:id="Rf4d85fa0b7974d86"/>
+    <p:sldId xmlns:r="http://schemas.openxmlformats.org/officeDocument/2006/relationships" id="266" r:id="R67d76b341c7b4e76"/>
+    <p:sldId xmlns:r="http://schemas.openxmlformats.org/officeDocument/2006/relationships" id="267" r:id="R2da9625580bf46b0"/>
+    <p:sldId xmlns:r="http://schemas.openxmlformats.org/officeDocument/2006/relationships" id="268" r:id="R3e7541dbb2dd40cd"/>
+    <p:sldId xmlns:r="http://schemas.openxmlformats.org/officeDocument/2006/relationships" id="269" r:id="R9cc7921131474353"/>
+    <p:sldId xmlns:r="http://schemas.openxmlformats.org/officeDocument/2006/relationships" id="270" r:id="Rcd9dbbc859e2499b"/>
+    <p:sldId xmlns:r="http://schemas.openxmlformats.org/officeDocument/2006/relationships" id="271" r:id="R4ac29f10104d4beb"/>
+    <p:sldId xmlns:r="http://schemas.openxmlformats.org/officeDocument/2006/relationships" id="272" r:id="Rd49f1a9000884a83"/>
+    <p:sldId xmlns:r="http://schemas.openxmlformats.org/officeDocument/2006/relationships" id="273" r:id="R1cbeb89667614060"/>
+    <p:sldId xmlns:r="http://schemas.openxmlformats.org/officeDocument/2006/relationships" id="274" r:id="R63c6aff1159b4c37"/>
+    <p:sldId xmlns:r="http://schemas.openxmlformats.org/officeDocument/2006/relationships" id="275" r:id="R97e99fe0d18d42c0"/>
   </p:sldIdLst>
   <p:sldSz cx="12192000" cy="6858000"/>
   <p:notesSz cx="6858000" cy="9144000"/>
@@ -4234,12 +4234,12 @@
   </p:cSld>
   <p:clrMap bg1="lt1" tx1="dk1" bg2="lt2" tx2="dk2" accent1="accent1" accent2="accent2" accent3="accent3" accent4="accent4" accent5="accent5" accent6="accent6" hlink="hlink" folHlink="folHlink"/>
   <p:sldLayoutIdLst>
-    <p:sldLayoutId xmlns:r="http://schemas.openxmlformats.org/officeDocument/2006/relationships" id="2147483649" r:id="R0634855f98ea42b8"/>
-    <p:sldLayoutId xmlns:r="http://schemas.openxmlformats.org/officeDocument/2006/relationships" id="2147483650" r:id="Rcd2e85b503914b6c"/>
-    <p:sldLayoutId xmlns:r="http://schemas.openxmlformats.org/officeDocument/2006/relationships" id="2147483651" r:id="R48bf1db40f914210"/>
-    <p:sldLayoutId xmlns:r="http://schemas.openxmlformats.org/officeDocument/2006/relationships" id="2147483652" r:id="R319bc657ff3c4985"/>
-    <p:sldLayoutId xmlns:r="http://schemas.openxmlformats.org/officeDocument/2006/relationships" id="2147483653" r:id="Rc42578a598e245ca"/>
-    <p:sldLayoutId xmlns:r="http://schemas.openxmlformats.org/officeDocument/2006/relationships" id="2147483654" r:id="Rd7da0c1ac28940d7"/>
+    <p:sldLayoutId xmlns:r="http://schemas.openxmlformats.org/officeDocument/2006/relationships" id="2147483649" r:id="Rbc88852fb92d45f3"/>
+    <p:sldLayoutId xmlns:r="http://schemas.openxmlformats.org/officeDocument/2006/relationships" id="2147483650" r:id="R2ff397b506484188"/>
+    <p:sldLayoutId xmlns:r="http://schemas.openxmlformats.org/officeDocument/2006/relationships" id="2147483651" r:id="R7ab07077a9474a19"/>
+    <p:sldLayoutId xmlns:r="http://schemas.openxmlformats.org/officeDocument/2006/relationships" id="2147483652" r:id="R78e1b3efd5644804"/>
+    <p:sldLayoutId xmlns:r="http://schemas.openxmlformats.org/officeDocument/2006/relationships" id="2147483653" r:id="R6cba859333094398"/>
+    <p:sldLayoutId xmlns:r="http://schemas.openxmlformats.org/officeDocument/2006/relationships" id="2147483654" r:id="Rc619457c54344291"/>
   </p:sldLayoutIdLst>
   <p:txStyles>
     <p:titleStyle>
@@ -6641,7 +6641,7 @@
           <p:cNvPr id="2" name="">
             <a:extLst xmlns:a="http://schemas.openxmlformats.org/drawingml/2006/main">
               <a:ext uri="{FF2B5EF4-FFF2-40B4-BE49-F238E27FC236}">
-                <a16:creationId xmlns:a16="http://schemas.microsoft.com/office/drawing/2014/main" id="{A78C3497-B280-4678-B12D-E7D4588C478E}"/>
+                <a16:creationId xmlns:a16="http://schemas.microsoft.com/office/drawing/2014/main" id="{8A42D9D6-7D4A-47F3-8677-443FF621971B}"/>
               </a:ext>
             </a:extLst>
           </p:cNvPr>
@@ -6797,7 +6797,7 @@
           <p:cNvPr id="3" name="">
             <a:extLst xmlns:a="http://schemas.openxmlformats.org/drawingml/2006/main">
               <a:ext uri="{FF2B5EF4-FFF2-40B4-BE49-F238E27FC236}">
-                <a16:creationId xmlns:a16="http://schemas.microsoft.com/office/drawing/2014/main" id="{6A877EB4-2C7A-47C4-94D2-45F1FB7A1752}"/>
+                <a16:creationId xmlns:a16="http://schemas.microsoft.com/office/drawing/2014/main" id="{63D98A83-0112-4A49-A518-7881AF07C764}"/>
               </a:ext>
             </a:extLst>
           </p:cNvPr>
@@ -6953,7 +6953,7 @@
           <p:cNvPr id="4" name="">
             <a:extLst xmlns:a="http://schemas.openxmlformats.org/drawingml/2006/main">
               <a:ext uri="{FF2B5EF4-FFF2-40B4-BE49-F238E27FC236}">
-                <a16:creationId xmlns:a16="http://schemas.microsoft.com/office/drawing/2014/main" id="{92E27FB3-4474-41BC-8BC1-A5A39CEDD542}"/>
+                <a16:creationId xmlns:a16="http://schemas.microsoft.com/office/drawing/2014/main" id="{BCAACFFA-33F4-488B-8793-3055FEED5E86}"/>
               </a:ext>
             </a:extLst>
           </p:cNvPr>
@@ -7109,7 +7109,7 @@
           <p:cNvPr id="5" name="">
             <a:extLst xmlns:a="http://schemas.openxmlformats.org/drawingml/2006/main">
               <a:ext uri="{FF2B5EF4-FFF2-40B4-BE49-F238E27FC236}">
-                <a16:creationId xmlns:a16="http://schemas.microsoft.com/office/drawing/2014/main" id="{FACADD98-C5A3-4211-B0E8-B1284CB09AC5}"/>
+                <a16:creationId xmlns:a16="http://schemas.microsoft.com/office/drawing/2014/main" id="{DF7D7670-340F-449A-8B79-C7DCF725EC55}"/>
               </a:ext>
             </a:extLst>
           </p:cNvPr>
@@ -7288,7 +7288,7 @@
           <p:cNvPr id="6" name="">
             <a:extLst xmlns:a="http://schemas.openxmlformats.org/drawingml/2006/main">
               <a:ext uri="{FF2B5EF4-FFF2-40B4-BE49-F238E27FC236}">
-                <a16:creationId xmlns:a16="http://schemas.microsoft.com/office/drawing/2014/main" id="{0D391174-B952-47E8-9BA6-BE008508D473}"/>
+                <a16:creationId xmlns:a16="http://schemas.microsoft.com/office/drawing/2014/main" id="{976A93A8-4E59-4CF6-AE74-4E61963B08C9}"/>
               </a:ext>
             </a:extLst>
           </p:cNvPr>
@@ -7442,7 +7442,7 @@
     </p:spTree>
     <p:extLst>
       <p:ext uri="{BB962C8B-B14F-4D97-AF65-F5344CB8AC3E}">
-        <p14:creationId xmlns:p14="http://schemas.microsoft.com/office/powerpoint/2010/main" val="726214553"/>
+        <p14:creationId xmlns:p14="http://schemas.microsoft.com/office/powerpoint/2010/main" val="1274245133"/>
       </p:ext>
     </p:extLst>
   </p:cSld>
@@ -7473,7 +7473,7 @@
           <p:cNvPr id="2" name="">
             <a:extLst xmlns:a="http://schemas.openxmlformats.org/drawingml/2006/main">
               <a:ext uri="{FF2B5EF4-FFF2-40B4-BE49-F238E27FC236}">
-                <a16:creationId xmlns:a16="http://schemas.microsoft.com/office/drawing/2014/main" id="{B30E79FA-7B02-421E-BF76-6AE82E189B1A}"/>
+                <a16:creationId xmlns:a16="http://schemas.microsoft.com/office/drawing/2014/main" id="{5A097AA2-D943-4F81-86D0-7C7F239477EA}"/>
               </a:ext>
             </a:extLst>
           </p:cNvPr>
@@ -7629,7 +7629,7 @@
           <p:cNvPr id="3" name="">
             <a:extLst xmlns:a="http://schemas.openxmlformats.org/drawingml/2006/main">
               <a:ext uri="{FF2B5EF4-FFF2-40B4-BE49-F238E27FC236}">
-                <a16:creationId xmlns:a16="http://schemas.microsoft.com/office/drawing/2014/main" id="{0DB43A7A-295E-498F-A5EC-24388D412F33}"/>
+                <a16:creationId xmlns:a16="http://schemas.microsoft.com/office/drawing/2014/main" id="{59075367-B43E-4BCE-B143-7C9F2F333061}"/>
               </a:ext>
             </a:extLst>
           </p:cNvPr>
@@ -7785,7 +7785,7 @@
           <p:cNvPr id="4" name="">
             <a:extLst xmlns:a="http://schemas.openxmlformats.org/drawingml/2006/main">
               <a:ext uri="{FF2B5EF4-FFF2-40B4-BE49-F238E27FC236}">
-                <a16:creationId xmlns:a16="http://schemas.microsoft.com/office/drawing/2014/main" id="{F60F2476-A502-4F16-93B0-41514AE1C26C}"/>
+                <a16:creationId xmlns:a16="http://schemas.microsoft.com/office/drawing/2014/main" id="{FE95F2C2-1EB5-4DE1-94FE-6B253253FFCF}"/>
               </a:ext>
             </a:extLst>
           </p:cNvPr>
@@ -7941,7 +7941,7 @@
           <p:cNvPr id="5" name="Chart">
             <a:extLst xmlns:a="http://schemas.openxmlformats.org/drawingml/2006/main">
               <a:ext uri="{FF2B5EF4-FFF2-40B4-BE49-F238E27FC236}">
-                <a16:creationId xmlns:a16="http://schemas.microsoft.com/office/drawing/2014/main" id="{7A1500C6-E206-400B-83E6-A94B1789AEC5}"/>
+                <a16:creationId xmlns:a16="http://schemas.microsoft.com/office/drawing/2014/main" id="{491C56AD-A06D-4DA2-852D-F3548F2F461C}"/>
               </a:ext>
             </a:extLst>
           </p:cNvPr>
@@ -7954,7 +7954,7 @@
         </p:xfrm>
         <a:graphic xmlns:a="http://schemas.openxmlformats.org/drawingml/2006/main">
           <a:graphicData uri="http://schemas.openxmlformats.org/drawingml/2006/chart">
-            <c:chart xmlns:r="http://schemas.openxmlformats.org/officeDocument/2006/relationships" xmlns:c="http://schemas.openxmlformats.org/drawingml/2006/chart" r:id="R32670bb8e16e4165"/>
+            <c:chart xmlns:r="http://schemas.openxmlformats.org/officeDocument/2006/relationships" xmlns:c="http://schemas.openxmlformats.org/drawingml/2006/chart" r:id="R3f124d2698eb45e2"/>
           </a:graphicData>
         </a:graphic>
       </p:graphicFrame>
@@ -7963,7 +7963,7 @@
           <p:cNvPr id="6" name="">
             <a:extLst xmlns:a="http://schemas.openxmlformats.org/drawingml/2006/main">
               <a:ext uri="{FF2B5EF4-FFF2-40B4-BE49-F238E27FC236}">
-                <a16:creationId xmlns:a16="http://schemas.microsoft.com/office/drawing/2014/main" id="{9E66FBCD-9E2F-453F-B003-E5757BCC62CC}"/>
+                <a16:creationId xmlns:a16="http://schemas.microsoft.com/office/drawing/2014/main" id="{58CFAC18-721E-4FC8-A98E-46A8FBDBE0B6}"/>
               </a:ext>
             </a:extLst>
           </p:cNvPr>
@@ -8140,7 +8140,7 @@
     </p:spTree>
     <p:extLst>
       <p:ext uri="{BB962C8B-B14F-4D97-AF65-F5344CB8AC3E}">
-        <p14:creationId xmlns:p14="http://schemas.microsoft.com/office/powerpoint/2010/main" val="1053818736"/>
+        <p14:creationId xmlns:p14="http://schemas.microsoft.com/office/powerpoint/2010/main" val="53128816"/>
       </p:ext>
     </p:extLst>
   </p:cSld>
@@ -8171,7 +8171,7 @@
           <p:cNvPr id="2" name="">
             <a:extLst xmlns:a="http://schemas.openxmlformats.org/drawingml/2006/main">
               <a:ext uri="{FF2B5EF4-FFF2-40B4-BE49-F238E27FC236}">
-                <a16:creationId xmlns:a16="http://schemas.microsoft.com/office/drawing/2014/main" id="{AA1DC082-77E6-4E7F-A95C-79B70F34FCA3}"/>
+                <a16:creationId xmlns:a16="http://schemas.microsoft.com/office/drawing/2014/main" id="{CD3E4726-25A6-4CD8-BC70-BE908BAA962F}"/>
               </a:ext>
             </a:extLst>
           </p:cNvPr>
@@ -8327,7 +8327,7 @@
           <p:cNvPr id="3" name="">
             <a:extLst xmlns:a="http://schemas.openxmlformats.org/drawingml/2006/main">
               <a:ext uri="{FF2B5EF4-FFF2-40B4-BE49-F238E27FC236}">
-                <a16:creationId xmlns:a16="http://schemas.microsoft.com/office/drawing/2014/main" id="{51FBDDBC-9ED3-4CE3-9269-1D8551BA7874}"/>
+                <a16:creationId xmlns:a16="http://schemas.microsoft.com/office/drawing/2014/main" id="{C529C011-8644-4557-BEAB-273D78B54413}"/>
               </a:ext>
             </a:extLst>
           </p:cNvPr>
@@ -8483,7 +8483,7 @@
           <p:cNvPr id="4" name="">
             <a:extLst xmlns:a="http://schemas.openxmlformats.org/drawingml/2006/main">
               <a:ext uri="{FF2B5EF4-FFF2-40B4-BE49-F238E27FC236}">
-                <a16:creationId xmlns:a16="http://schemas.microsoft.com/office/drawing/2014/main" id="{18FC3526-8D65-45A8-B479-A513C2AC236E}"/>
+                <a16:creationId xmlns:a16="http://schemas.microsoft.com/office/drawing/2014/main" id="{4CD992D4-D580-42E5-85CF-0BFDD765D373}"/>
               </a:ext>
             </a:extLst>
           </p:cNvPr>
@@ -8639,7 +8639,7 @@
           <p:cNvPr id="5" name="Chart">
             <a:extLst xmlns:a="http://schemas.openxmlformats.org/drawingml/2006/main">
               <a:ext uri="{FF2B5EF4-FFF2-40B4-BE49-F238E27FC236}">
-                <a16:creationId xmlns:a16="http://schemas.microsoft.com/office/drawing/2014/main" id="{A1060446-E958-4B89-9332-0CDFC17881A5}"/>
+                <a16:creationId xmlns:a16="http://schemas.microsoft.com/office/drawing/2014/main" id="{384CE178-A18C-4AD8-949E-24B8EC0B0A11}"/>
               </a:ext>
             </a:extLst>
           </p:cNvPr>
@@ -8652,7 +8652,7 @@
         </p:xfrm>
         <a:graphic xmlns:a="http://schemas.openxmlformats.org/drawingml/2006/main">
           <a:graphicData uri="http://schemas.openxmlformats.org/drawingml/2006/chart">
-            <c:chart xmlns:r="http://schemas.openxmlformats.org/officeDocument/2006/relationships" xmlns:c="http://schemas.openxmlformats.org/drawingml/2006/chart" r:id="Rb071e5fb0ea44984"/>
+            <c:chart xmlns:r="http://schemas.openxmlformats.org/officeDocument/2006/relationships" xmlns:c="http://schemas.openxmlformats.org/drawingml/2006/chart" r:id="Rf2a2e63058b74ccf"/>
           </a:graphicData>
         </a:graphic>
       </p:graphicFrame>
@@ -8661,7 +8661,7 @@
           <p:cNvPr id="6" name="">
             <a:extLst xmlns:a="http://schemas.openxmlformats.org/drawingml/2006/main">
               <a:ext uri="{FF2B5EF4-FFF2-40B4-BE49-F238E27FC236}">
-                <a16:creationId xmlns:a16="http://schemas.microsoft.com/office/drawing/2014/main" id="{A2D658C8-E0DC-4108-A86F-23DD42181569}"/>
+                <a16:creationId xmlns:a16="http://schemas.microsoft.com/office/drawing/2014/main" id="{91F98F17-2FD5-4E0C-A897-6EF065197A17}"/>
               </a:ext>
             </a:extLst>
           </p:cNvPr>
@@ -8838,7 +8838,7 @@
     </p:spTree>
     <p:extLst>
       <p:ext uri="{BB962C8B-B14F-4D97-AF65-F5344CB8AC3E}">
-        <p14:creationId xmlns:p14="http://schemas.microsoft.com/office/powerpoint/2010/main" val="2134969319"/>
+        <p14:creationId xmlns:p14="http://schemas.microsoft.com/office/powerpoint/2010/main" val="794407195"/>
       </p:ext>
     </p:extLst>
   </p:cSld>
@@ -8869,7 +8869,7 @@
           <p:cNvPr id="2" name="">
             <a:extLst xmlns:a="http://schemas.openxmlformats.org/drawingml/2006/main">
               <a:ext uri="{FF2B5EF4-FFF2-40B4-BE49-F238E27FC236}">
-                <a16:creationId xmlns:a16="http://schemas.microsoft.com/office/drawing/2014/main" id="{9721EC2D-00AA-4F33-BE31-65EEE909CD0E}"/>
+                <a16:creationId xmlns:a16="http://schemas.microsoft.com/office/drawing/2014/main" id="{E7D0C70D-6001-4BC3-B6F0-C21273ADB9AA}"/>
               </a:ext>
             </a:extLst>
           </p:cNvPr>
@@ -9025,7 +9025,7 @@
           <p:cNvPr id="3" name="">
             <a:extLst xmlns:a="http://schemas.openxmlformats.org/drawingml/2006/main">
               <a:ext uri="{FF2B5EF4-FFF2-40B4-BE49-F238E27FC236}">
-                <a16:creationId xmlns:a16="http://schemas.microsoft.com/office/drawing/2014/main" id="{D10FF516-8ACA-4CB2-B425-DECED1CF9705}"/>
+                <a16:creationId xmlns:a16="http://schemas.microsoft.com/office/drawing/2014/main" id="{9CF35808-5CFF-45CB-BBF9-79ED71C8CF54}"/>
               </a:ext>
             </a:extLst>
           </p:cNvPr>
@@ -9181,7 +9181,7 @@
           <p:cNvPr id="4" name="">
             <a:extLst xmlns:a="http://schemas.openxmlformats.org/drawingml/2006/main">
               <a:ext uri="{FF2B5EF4-FFF2-40B4-BE49-F238E27FC236}">
-                <a16:creationId xmlns:a16="http://schemas.microsoft.com/office/drawing/2014/main" id="{96B46B8A-5384-40AD-AC81-5BEE256EE556}"/>
+                <a16:creationId xmlns:a16="http://schemas.microsoft.com/office/drawing/2014/main" id="{C018A5DA-8537-4C4C-8D1B-54850E91E1C3}"/>
               </a:ext>
             </a:extLst>
           </p:cNvPr>
@@ -9337,7 +9337,7 @@
           <p:cNvPr id="5" name="Chart">
             <a:extLst xmlns:a="http://schemas.openxmlformats.org/drawingml/2006/main">
               <a:ext uri="{FF2B5EF4-FFF2-40B4-BE49-F238E27FC236}">
-                <a16:creationId xmlns:a16="http://schemas.microsoft.com/office/drawing/2014/main" id="{4C7FE5D8-B215-472E-A1FD-8E035DBCA896}"/>
+                <a16:creationId xmlns:a16="http://schemas.microsoft.com/office/drawing/2014/main" id="{7F71AADC-BAC5-4B21-9E36-3F16D993B019}"/>
               </a:ext>
             </a:extLst>
           </p:cNvPr>
@@ -9350,7 +9350,7 @@
         </p:xfrm>
         <a:graphic xmlns:a="http://schemas.openxmlformats.org/drawingml/2006/main">
           <a:graphicData uri="http://schemas.openxmlformats.org/drawingml/2006/chart">
-            <c:chart xmlns:r="http://schemas.openxmlformats.org/officeDocument/2006/relationships" xmlns:c="http://schemas.openxmlformats.org/drawingml/2006/chart" r:id="Reaa2910275224f40"/>
+            <c:chart xmlns:r="http://schemas.openxmlformats.org/officeDocument/2006/relationships" xmlns:c="http://schemas.openxmlformats.org/drawingml/2006/chart" r:id="Red8c2e76cae34975"/>
           </a:graphicData>
         </a:graphic>
       </p:graphicFrame>
@@ -9359,7 +9359,7 @@
           <p:cNvPr id="6" name="">
             <a:extLst xmlns:a="http://schemas.openxmlformats.org/drawingml/2006/main">
               <a:ext uri="{FF2B5EF4-FFF2-40B4-BE49-F238E27FC236}">
-                <a16:creationId xmlns:a16="http://schemas.microsoft.com/office/drawing/2014/main" id="{38E0441B-1819-4140-9AA3-FCE7D38B4D69}"/>
+                <a16:creationId xmlns:a16="http://schemas.microsoft.com/office/drawing/2014/main" id="{EF011425-77D7-46AF-98E2-1F5C84D358DC}"/>
               </a:ext>
             </a:extLst>
           </p:cNvPr>
@@ -9536,7 +9536,7 @@
     </p:spTree>
     <p:extLst>
       <p:ext uri="{BB962C8B-B14F-4D97-AF65-F5344CB8AC3E}">
-        <p14:creationId xmlns:p14="http://schemas.microsoft.com/office/powerpoint/2010/main" val="1020828154"/>
+        <p14:creationId xmlns:p14="http://schemas.microsoft.com/office/powerpoint/2010/main" val="1260945102"/>
       </p:ext>
     </p:extLst>
   </p:cSld>
@@ -9567,7 +9567,7 @@
           <p:cNvPr id="2" name="">
             <a:extLst xmlns:a="http://schemas.openxmlformats.org/drawingml/2006/main">
               <a:ext uri="{FF2B5EF4-FFF2-40B4-BE49-F238E27FC236}">
-                <a16:creationId xmlns:a16="http://schemas.microsoft.com/office/drawing/2014/main" id="{5CB19123-C888-4E0E-A8D2-9FC3610EC4C9}"/>
+                <a16:creationId xmlns:a16="http://schemas.microsoft.com/office/drawing/2014/main" id="{276CBA94-3455-4F81-BC94-9866FCDE0042}"/>
               </a:ext>
             </a:extLst>
           </p:cNvPr>
@@ -9723,7 +9723,7 @@
           <p:cNvPr id="3" name="">
             <a:extLst xmlns:a="http://schemas.openxmlformats.org/drawingml/2006/main">
               <a:ext uri="{FF2B5EF4-FFF2-40B4-BE49-F238E27FC236}">
-                <a16:creationId xmlns:a16="http://schemas.microsoft.com/office/drawing/2014/main" id="{3DD6B5C8-3DFA-4D74-A6A3-EADB89E92BC9}"/>
+                <a16:creationId xmlns:a16="http://schemas.microsoft.com/office/drawing/2014/main" id="{FC09F15A-AE9D-499A-AF7E-61838F035A4A}"/>
               </a:ext>
             </a:extLst>
           </p:cNvPr>
@@ -9879,7 +9879,7 @@
           <p:cNvPr id="4" name="">
             <a:extLst xmlns:a="http://schemas.openxmlformats.org/drawingml/2006/main">
               <a:ext uri="{FF2B5EF4-FFF2-40B4-BE49-F238E27FC236}">
-                <a16:creationId xmlns:a16="http://schemas.microsoft.com/office/drawing/2014/main" id="{88C68992-7AE5-4384-BE7F-BA2668283D06}"/>
+                <a16:creationId xmlns:a16="http://schemas.microsoft.com/office/drawing/2014/main" id="{964E5BA9-7CC9-484F-B6D5-BC132B564016}"/>
               </a:ext>
             </a:extLst>
           </p:cNvPr>
@@ -10035,7 +10035,7 @@
           <p:cNvPr id="5" name="Chart">
             <a:extLst xmlns:a="http://schemas.openxmlformats.org/drawingml/2006/main">
               <a:ext uri="{FF2B5EF4-FFF2-40B4-BE49-F238E27FC236}">
-                <a16:creationId xmlns:a16="http://schemas.microsoft.com/office/drawing/2014/main" id="{8D187F46-AD8B-4C32-92FE-956F65A23CF5}"/>
+                <a16:creationId xmlns:a16="http://schemas.microsoft.com/office/drawing/2014/main" id="{89B036D1-7CFB-4A2E-8FAD-5B1E8FB78E0E}"/>
               </a:ext>
             </a:extLst>
           </p:cNvPr>
@@ -10048,7 +10048,7 @@
         </p:xfrm>
         <a:graphic xmlns:a="http://schemas.openxmlformats.org/drawingml/2006/main">
           <a:graphicData uri="http://schemas.openxmlformats.org/drawingml/2006/chart">
-            <c:chart xmlns:r="http://schemas.openxmlformats.org/officeDocument/2006/relationships" xmlns:c="http://schemas.openxmlformats.org/drawingml/2006/chart" r:id="Rcd6492cca8384072"/>
+            <c:chart xmlns:r="http://schemas.openxmlformats.org/officeDocument/2006/relationships" xmlns:c="http://schemas.openxmlformats.org/drawingml/2006/chart" r:id="R9deba88a07614f80"/>
           </a:graphicData>
         </a:graphic>
       </p:graphicFrame>
@@ -10057,7 +10057,7 @@
           <p:cNvPr id="6" name="">
             <a:extLst xmlns:a="http://schemas.openxmlformats.org/drawingml/2006/main">
               <a:ext uri="{FF2B5EF4-FFF2-40B4-BE49-F238E27FC236}">
-                <a16:creationId xmlns:a16="http://schemas.microsoft.com/office/drawing/2014/main" id="{C01B9B27-4834-45B7-9E3E-169566AEAC1D}"/>
+                <a16:creationId xmlns:a16="http://schemas.microsoft.com/office/drawing/2014/main" id="{83C92C49-C99C-401F-8791-BDB66E05DFEE}"/>
               </a:ext>
             </a:extLst>
           </p:cNvPr>
@@ -10234,7 +10234,7 @@
     </p:spTree>
     <p:extLst>
       <p:ext uri="{BB962C8B-B14F-4D97-AF65-F5344CB8AC3E}">
-        <p14:creationId xmlns:p14="http://schemas.microsoft.com/office/powerpoint/2010/main" val="1870974551"/>
+        <p14:creationId xmlns:p14="http://schemas.microsoft.com/office/powerpoint/2010/main" val="1326969942"/>
       </p:ext>
     </p:extLst>
   </p:cSld>
@@ -10265,7 +10265,7 @@
           <p:cNvPr id="2" name="">
             <a:extLst xmlns:a="http://schemas.openxmlformats.org/drawingml/2006/main">
               <a:ext uri="{FF2B5EF4-FFF2-40B4-BE49-F238E27FC236}">
-                <a16:creationId xmlns:a16="http://schemas.microsoft.com/office/drawing/2014/main" id="{6AE7E1B3-A87B-4FBB-9942-B8F1B6133F7F}"/>
+                <a16:creationId xmlns:a16="http://schemas.microsoft.com/office/drawing/2014/main" id="{CA9FA41C-4D0C-40C6-8CFF-8972C960E458}"/>
               </a:ext>
             </a:extLst>
           </p:cNvPr>
@@ -10421,7 +10421,7 @@
           <p:cNvPr id="3" name="">
             <a:extLst xmlns:a="http://schemas.openxmlformats.org/drawingml/2006/main">
               <a:ext uri="{FF2B5EF4-FFF2-40B4-BE49-F238E27FC236}">
-                <a16:creationId xmlns:a16="http://schemas.microsoft.com/office/drawing/2014/main" id="{7D3B9B44-2CB7-4649-88A3-C001D272A231}"/>
+                <a16:creationId xmlns:a16="http://schemas.microsoft.com/office/drawing/2014/main" id="{6F144451-87BC-4DAF-9772-76E822575193}"/>
               </a:ext>
             </a:extLst>
           </p:cNvPr>
@@ -10577,7 +10577,7 @@
           <p:cNvPr id="4" name="">
             <a:extLst xmlns:a="http://schemas.openxmlformats.org/drawingml/2006/main">
               <a:ext uri="{FF2B5EF4-FFF2-40B4-BE49-F238E27FC236}">
-                <a16:creationId xmlns:a16="http://schemas.microsoft.com/office/drawing/2014/main" id="{3BA64C4D-4CD5-4537-897F-B2A605D7E451}"/>
+                <a16:creationId xmlns:a16="http://schemas.microsoft.com/office/drawing/2014/main" id="{B7CD91D5-8DA6-4230-A66B-B6F908E91249}"/>
               </a:ext>
             </a:extLst>
           </p:cNvPr>
@@ -10733,7 +10733,7 @@
           <p:cNvPr id="5" name="">
             <a:extLst xmlns:a="http://schemas.openxmlformats.org/drawingml/2006/main">
               <a:ext uri="{FF2B5EF4-FFF2-40B4-BE49-F238E27FC236}">
-                <a16:creationId xmlns:a16="http://schemas.microsoft.com/office/drawing/2014/main" id="{8640DC95-2B9D-46AB-8DBC-73EFC48CC77F}"/>
+                <a16:creationId xmlns:a16="http://schemas.microsoft.com/office/drawing/2014/main" id="{C7160891-5159-47BC-B8F8-7A686C093B59}"/>
               </a:ext>
             </a:extLst>
           </p:cNvPr>
@@ -11547,7 +11547,7 @@
           <p:cNvPr id="6" name="">
             <a:extLst xmlns:a="http://schemas.openxmlformats.org/drawingml/2006/main">
               <a:ext uri="{FF2B5EF4-FFF2-40B4-BE49-F238E27FC236}">
-                <a16:creationId xmlns:a16="http://schemas.microsoft.com/office/drawing/2014/main" id="{96B81A82-AA53-4CBE-AC71-A3FC67DB4CC6}"/>
+                <a16:creationId xmlns:a16="http://schemas.microsoft.com/office/drawing/2014/main" id="{B055DAAA-9179-4F89-B5B7-1FC54B7198CD}"/>
               </a:ext>
             </a:extLst>
           </p:cNvPr>
@@ -11724,7 +11724,7 @@
     </p:spTree>
     <p:extLst>
       <p:ext uri="{BB962C8B-B14F-4D97-AF65-F5344CB8AC3E}">
-        <p14:creationId xmlns:p14="http://schemas.microsoft.com/office/powerpoint/2010/main" val="1298543163"/>
+        <p14:creationId xmlns:p14="http://schemas.microsoft.com/office/powerpoint/2010/main" val="459263294"/>
       </p:ext>
     </p:extLst>
   </p:cSld>
@@ -11755,7 +11755,7 @@
           <p:cNvPr id="2" name="">
             <a:extLst xmlns:a="http://schemas.openxmlformats.org/drawingml/2006/main">
               <a:ext uri="{FF2B5EF4-FFF2-40B4-BE49-F238E27FC236}">
-                <a16:creationId xmlns:a16="http://schemas.microsoft.com/office/drawing/2014/main" id="{422DE3FD-C672-45F1-95E7-78DF534C5E17}"/>
+                <a16:creationId xmlns:a16="http://schemas.microsoft.com/office/drawing/2014/main" id="{FFEF86E9-3A56-484F-85B1-91C93AC40589}"/>
               </a:ext>
             </a:extLst>
           </p:cNvPr>
@@ -11911,7 +11911,7 @@
           <p:cNvPr id="3" name="">
             <a:extLst xmlns:a="http://schemas.openxmlformats.org/drawingml/2006/main">
               <a:ext uri="{FF2B5EF4-FFF2-40B4-BE49-F238E27FC236}">
-                <a16:creationId xmlns:a16="http://schemas.microsoft.com/office/drawing/2014/main" id="{86AD1C14-8486-4644-B9BD-2292F65D24E4}"/>
+                <a16:creationId xmlns:a16="http://schemas.microsoft.com/office/drawing/2014/main" id="{AA9DF856-DB5F-41F7-A86F-BBE7422A55F1}"/>
               </a:ext>
             </a:extLst>
           </p:cNvPr>
@@ -12067,7 +12067,7 @@
           <p:cNvPr id="4" name="">
             <a:extLst xmlns:a="http://schemas.openxmlformats.org/drawingml/2006/main">
               <a:ext uri="{FF2B5EF4-FFF2-40B4-BE49-F238E27FC236}">
-                <a16:creationId xmlns:a16="http://schemas.microsoft.com/office/drawing/2014/main" id="{AB676BDF-849B-4EE6-9BC4-990A520AB438}"/>
+                <a16:creationId xmlns:a16="http://schemas.microsoft.com/office/drawing/2014/main" id="{CC264A10-2CAB-49F3-83D7-110F2FE02887}"/>
               </a:ext>
             </a:extLst>
           </p:cNvPr>
@@ -12223,7 +12223,7 @@
           <p:cNvPr id="5" name="Chart">
             <a:extLst xmlns:a="http://schemas.openxmlformats.org/drawingml/2006/main">
               <a:ext uri="{FF2B5EF4-FFF2-40B4-BE49-F238E27FC236}">
-                <a16:creationId xmlns:a16="http://schemas.microsoft.com/office/drawing/2014/main" id="{312CDB84-95BC-4B10-A7A0-BF460F9E6AE4}"/>
+                <a16:creationId xmlns:a16="http://schemas.microsoft.com/office/drawing/2014/main" id="{E6A02133-2286-449B-A84D-798156EFF678}"/>
               </a:ext>
             </a:extLst>
           </p:cNvPr>
@@ -12236,7 +12236,7 @@
         </p:xfrm>
         <a:graphic xmlns:a="http://schemas.openxmlformats.org/drawingml/2006/main">
           <a:graphicData uri="http://schemas.openxmlformats.org/drawingml/2006/chart">
-            <c:chart xmlns:r="http://schemas.openxmlformats.org/officeDocument/2006/relationships" xmlns:c="http://schemas.openxmlformats.org/drawingml/2006/chart" r:id="R9e780ef0f7e3485e"/>
+            <c:chart xmlns:r="http://schemas.openxmlformats.org/officeDocument/2006/relationships" xmlns:c="http://schemas.openxmlformats.org/drawingml/2006/chart" r:id="R35d2495543d04e05"/>
           </a:graphicData>
         </a:graphic>
       </p:graphicFrame>
@@ -12245,7 +12245,7 @@
           <p:cNvPr id="6" name="">
             <a:extLst xmlns:a="http://schemas.openxmlformats.org/drawingml/2006/main">
               <a:ext uri="{FF2B5EF4-FFF2-40B4-BE49-F238E27FC236}">
-                <a16:creationId xmlns:a16="http://schemas.microsoft.com/office/drawing/2014/main" id="{47F1E9C1-EFFB-427C-A5F8-B3540ABF2E68}"/>
+                <a16:creationId xmlns:a16="http://schemas.microsoft.com/office/drawing/2014/main" id="{F0202296-A4CE-4FA3-8C96-A96E24B272E3}"/>
               </a:ext>
             </a:extLst>
           </p:cNvPr>
@@ -12422,7 +12422,7 @@
     </p:spTree>
     <p:extLst>
       <p:ext uri="{BB962C8B-B14F-4D97-AF65-F5344CB8AC3E}">
-        <p14:creationId xmlns:p14="http://schemas.microsoft.com/office/powerpoint/2010/main" val="526670714"/>
+        <p14:creationId xmlns:p14="http://schemas.microsoft.com/office/powerpoint/2010/main" val="2032022617"/>
       </p:ext>
     </p:extLst>
   </p:cSld>
@@ -12453,7 +12453,7 @@
           <p:cNvPr id="2" name="">
             <a:extLst xmlns:a="http://schemas.openxmlformats.org/drawingml/2006/main">
               <a:ext uri="{FF2B5EF4-FFF2-40B4-BE49-F238E27FC236}">
-                <a16:creationId xmlns:a16="http://schemas.microsoft.com/office/drawing/2014/main" id="{2710E4BD-9013-419E-8241-3AC6676E434B}"/>
+                <a16:creationId xmlns:a16="http://schemas.microsoft.com/office/drawing/2014/main" id="{E0A234A4-E351-4061-8909-11A0F9BAF95A}"/>
               </a:ext>
             </a:extLst>
           </p:cNvPr>
@@ -12483,7 +12483,7 @@
           <p:cNvPr id="3" name="">
             <a:extLst xmlns:a="http://schemas.openxmlformats.org/drawingml/2006/main">
               <a:ext uri="{FF2B5EF4-FFF2-40B4-BE49-F238E27FC236}">
-                <a16:creationId xmlns:a16="http://schemas.microsoft.com/office/drawing/2014/main" id="{81544B0D-C5CF-4A02-8ED1-541E79E84C1D}"/>
+                <a16:creationId xmlns:a16="http://schemas.microsoft.com/office/drawing/2014/main" id="{60101072-44AF-4287-A985-2206A6D8CBCF}"/>
               </a:ext>
             </a:extLst>
           </p:cNvPr>
@@ -12513,7 +12513,7 @@
           <p:cNvPr id="4" name="">
             <a:extLst xmlns:a="http://schemas.openxmlformats.org/drawingml/2006/main">
               <a:ext uri="{FF2B5EF4-FFF2-40B4-BE49-F238E27FC236}">
-                <a16:creationId xmlns:a16="http://schemas.microsoft.com/office/drawing/2014/main" id="{52B8A398-49E6-436F-952D-3156A1BF5E0F}"/>
+                <a16:creationId xmlns:a16="http://schemas.microsoft.com/office/drawing/2014/main" id="{9D81017B-7F9F-4194-B1A7-1DCD5003C2D8}"/>
               </a:ext>
             </a:extLst>
           </p:cNvPr>
@@ -12546,7 +12546,7 @@
           <p:cNvPr id="5" name="">
             <a:extLst xmlns:a="http://schemas.openxmlformats.org/drawingml/2006/main">
               <a:ext uri="{FF2B5EF4-FFF2-40B4-BE49-F238E27FC236}">
-                <a16:creationId xmlns:a16="http://schemas.microsoft.com/office/drawing/2014/main" id="{FABA1AFF-610C-40F2-89DF-7F53FE7F2562}"/>
+                <a16:creationId xmlns:a16="http://schemas.microsoft.com/office/drawing/2014/main" id="{74347D5F-2197-457E-92F7-BDAAD67EBC37}"/>
               </a:ext>
             </a:extLst>
           </p:cNvPr>
@@ -12576,7 +12576,7 @@
           <p:cNvPr id="6" name="">
             <a:extLst xmlns:a="http://schemas.openxmlformats.org/drawingml/2006/main">
               <a:ext uri="{FF2B5EF4-FFF2-40B4-BE49-F238E27FC236}">
-                <a16:creationId xmlns:a16="http://schemas.microsoft.com/office/drawing/2014/main" id="{7A12083D-4CCB-4E58-8A63-C7482E131858}"/>
+                <a16:creationId xmlns:a16="http://schemas.microsoft.com/office/drawing/2014/main" id="{56D17A80-6226-4CA0-8AD0-1F9470637015}"/>
               </a:ext>
             </a:extLst>
           </p:cNvPr>
@@ -12606,7 +12606,7 @@
           <p:cNvPr id="7" name="">
             <a:extLst xmlns:a="http://schemas.openxmlformats.org/drawingml/2006/main">
               <a:ext uri="{FF2B5EF4-FFF2-40B4-BE49-F238E27FC236}">
-                <a16:creationId xmlns:a16="http://schemas.microsoft.com/office/drawing/2014/main" id="{FC9E2A71-8100-4D68-A8C3-F10F3B536E5A}"/>
+                <a16:creationId xmlns:a16="http://schemas.microsoft.com/office/drawing/2014/main" id="{0411FF8A-B9D5-483B-A39B-C147917674BA}"/>
               </a:ext>
             </a:extLst>
           </p:cNvPr>
@@ -12762,7 +12762,7 @@
           <p:cNvPr id="8" name="">
             <a:extLst xmlns:a="http://schemas.openxmlformats.org/drawingml/2006/main">
               <a:ext uri="{FF2B5EF4-FFF2-40B4-BE49-F238E27FC236}">
-                <a16:creationId xmlns:a16="http://schemas.microsoft.com/office/drawing/2014/main" id="{540F69BB-971B-4B88-B2E8-39243D21AE10}"/>
+                <a16:creationId xmlns:a16="http://schemas.microsoft.com/office/drawing/2014/main" id="{6B7E9CA3-788B-40AC-A005-9DAF9E21B4FA}"/>
               </a:ext>
             </a:extLst>
           </p:cNvPr>
@@ -12918,7 +12918,7 @@
           <p:cNvPr id="9" name="">
             <a:extLst xmlns:a="http://schemas.openxmlformats.org/drawingml/2006/main">
               <a:ext uri="{FF2B5EF4-FFF2-40B4-BE49-F238E27FC236}">
-                <a16:creationId xmlns:a16="http://schemas.microsoft.com/office/drawing/2014/main" id="{389DB021-2346-47C6-822C-A9A42F0918A9}"/>
+                <a16:creationId xmlns:a16="http://schemas.microsoft.com/office/drawing/2014/main" id="{148C7B06-85C0-4E0A-A107-A91E615D6697}"/>
               </a:ext>
             </a:extLst>
           </p:cNvPr>
@@ -13074,7 +13074,7 @@
           <p:cNvPr id="10" name="">
             <a:extLst xmlns:a="http://schemas.openxmlformats.org/drawingml/2006/main">
               <a:ext uri="{FF2B5EF4-FFF2-40B4-BE49-F238E27FC236}">
-                <a16:creationId xmlns:a16="http://schemas.microsoft.com/office/drawing/2014/main" id="{DF131604-875B-408D-A203-859915972603}"/>
+                <a16:creationId xmlns:a16="http://schemas.microsoft.com/office/drawing/2014/main" id="{0DFE497E-79A6-45D0-B4A3-7DB2770E46E6}"/>
               </a:ext>
             </a:extLst>
           </p:cNvPr>
@@ -13234,7 +13234,7 @@
           <p:cNvPr id="11" name="">
             <a:extLst xmlns:a="http://schemas.openxmlformats.org/drawingml/2006/main">
               <a:ext uri="{FF2B5EF4-FFF2-40B4-BE49-F238E27FC236}">
-                <a16:creationId xmlns:a16="http://schemas.microsoft.com/office/drawing/2014/main" id="{387F4E6D-46BB-4EA2-A287-5AC7384E63C2}"/>
+                <a16:creationId xmlns:a16="http://schemas.microsoft.com/office/drawing/2014/main" id="{8E610718-75E1-409D-879A-F672DAC09E1D}"/>
               </a:ext>
             </a:extLst>
           </p:cNvPr>
@@ -13394,7 +13394,7 @@
           <p:cNvPr id="12" name="">
             <a:extLst xmlns:a="http://schemas.openxmlformats.org/drawingml/2006/main">
               <a:ext uri="{FF2B5EF4-FFF2-40B4-BE49-F238E27FC236}">
-                <a16:creationId xmlns:a16="http://schemas.microsoft.com/office/drawing/2014/main" id="{8D759E3F-0D80-46FD-9C41-AE35330E4AE6}"/>
+                <a16:creationId xmlns:a16="http://schemas.microsoft.com/office/drawing/2014/main" id="{4FD350C4-8D8D-41DA-9640-2A056680CBEB}"/>
               </a:ext>
             </a:extLst>
           </p:cNvPr>
@@ -13554,7 +13554,7 @@
           <p:cNvPr id="13" name="">
             <a:extLst xmlns:a="http://schemas.openxmlformats.org/drawingml/2006/main">
               <a:ext uri="{FF2B5EF4-FFF2-40B4-BE49-F238E27FC236}">
-                <a16:creationId xmlns:a16="http://schemas.microsoft.com/office/drawing/2014/main" id="{39F501A9-7EAA-45D3-B2DE-0F019263987A}"/>
+                <a16:creationId xmlns:a16="http://schemas.microsoft.com/office/drawing/2014/main" id="{6DD1F8A9-CD93-4FE2-9644-CF7C504C8D97}"/>
               </a:ext>
             </a:extLst>
           </p:cNvPr>
@@ -13714,7 +13714,7 @@
           <p:cNvPr id="14" name="">
             <a:extLst xmlns:a="http://schemas.openxmlformats.org/drawingml/2006/main">
               <a:ext uri="{FF2B5EF4-FFF2-40B4-BE49-F238E27FC236}">
-                <a16:creationId xmlns:a16="http://schemas.microsoft.com/office/drawing/2014/main" id="{E8280629-4BE5-4066-B548-A757161298A4}"/>
+                <a16:creationId xmlns:a16="http://schemas.microsoft.com/office/drawing/2014/main" id="{EAE93264-B75B-4FB0-A07A-3CED3E6E112D}"/>
               </a:ext>
             </a:extLst>
           </p:cNvPr>
@@ -13874,7 +13874,7 @@
           <p:cNvPr id="15" name="">
             <a:extLst xmlns:a="http://schemas.openxmlformats.org/drawingml/2006/main">
               <a:ext uri="{FF2B5EF4-FFF2-40B4-BE49-F238E27FC236}">
-                <a16:creationId xmlns:a16="http://schemas.microsoft.com/office/drawing/2014/main" id="{61471483-C7A7-4C02-AF2C-35251B83026E}"/>
+                <a16:creationId xmlns:a16="http://schemas.microsoft.com/office/drawing/2014/main" id="{050FC871-207B-40FD-A170-F3D039F3B1F5}"/>
               </a:ext>
             </a:extLst>
           </p:cNvPr>
@@ -14034,7 +14034,7 @@
           <p:cNvPr id="16" name="">
             <a:extLst xmlns:a="http://schemas.openxmlformats.org/drawingml/2006/main">
               <a:ext uri="{FF2B5EF4-FFF2-40B4-BE49-F238E27FC236}">
-                <a16:creationId xmlns:a16="http://schemas.microsoft.com/office/drawing/2014/main" id="{4725499C-D576-412A-A772-52E1316D3C59}"/>
+                <a16:creationId xmlns:a16="http://schemas.microsoft.com/office/drawing/2014/main" id="{43A90BCA-FC96-44CE-A72C-04168BEC820E}"/>
               </a:ext>
             </a:extLst>
           </p:cNvPr>
@@ -14211,7 +14211,7 @@
     </p:spTree>
     <p:extLst>
       <p:ext uri="{BB962C8B-B14F-4D97-AF65-F5344CB8AC3E}">
-        <p14:creationId xmlns:p14="http://schemas.microsoft.com/office/powerpoint/2010/main" val="1581433111"/>
+        <p14:creationId xmlns:p14="http://schemas.microsoft.com/office/powerpoint/2010/main" val="235059928"/>
       </p:ext>
     </p:extLst>
   </p:cSld>
@@ -14242,7 +14242,7 @@
           <p:cNvPr id="2" name="">
             <a:extLst xmlns:a="http://schemas.openxmlformats.org/drawingml/2006/main">
               <a:ext uri="{FF2B5EF4-FFF2-40B4-BE49-F238E27FC236}">
-                <a16:creationId xmlns:a16="http://schemas.microsoft.com/office/drawing/2014/main" id="{E0538FF6-98F7-4F29-BCE6-4ACDF12809A4}"/>
+                <a16:creationId xmlns:a16="http://schemas.microsoft.com/office/drawing/2014/main" id="{C34B3EB5-B235-4512-878E-E8643F81ED33}"/>
               </a:ext>
             </a:extLst>
           </p:cNvPr>
@@ -14398,7 +14398,7 @@
           <p:cNvPr id="3" name="">
             <a:extLst xmlns:a="http://schemas.openxmlformats.org/drawingml/2006/main">
               <a:ext uri="{FF2B5EF4-FFF2-40B4-BE49-F238E27FC236}">
-                <a16:creationId xmlns:a16="http://schemas.microsoft.com/office/drawing/2014/main" id="{39BD3903-A6F4-4D15-8FA2-6F90F2BCC5D0}"/>
+                <a16:creationId xmlns:a16="http://schemas.microsoft.com/office/drawing/2014/main" id="{A224E2FE-6528-49DC-B0B7-11C15ED0E377}"/>
               </a:ext>
             </a:extLst>
           </p:cNvPr>
@@ -14554,7 +14554,7 @@
           <p:cNvPr id="4" name="">
             <a:extLst xmlns:a="http://schemas.openxmlformats.org/drawingml/2006/main">
               <a:ext uri="{FF2B5EF4-FFF2-40B4-BE49-F238E27FC236}">
-                <a16:creationId xmlns:a16="http://schemas.microsoft.com/office/drawing/2014/main" id="{41D485E3-717B-4B38-8C68-BC55C3175E72}"/>
+                <a16:creationId xmlns:a16="http://schemas.microsoft.com/office/drawing/2014/main" id="{65B70617-79BC-4B54-A6E5-7F6C97BC1678}"/>
               </a:ext>
             </a:extLst>
           </p:cNvPr>
@@ -14710,7 +14710,7 @@
           <p:cNvPr id="5" name="">
             <a:extLst xmlns:a="http://schemas.openxmlformats.org/drawingml/2006/main">
               <a:ext uri="{FF2B5EF4-FFF2-40B4-BE49-F238E27FC236}">
-                <a16:creationId xmlns:a16="http://schemas.microsoft.com/office/drawing/2014/main" id="{37866F91-8DCF-4B02-850E-52712CEF0D0C}"/>
+                <a16:creationId xmlns:a16="http://schemas.microsoft.com/office/drawing/2014/main" id="{E2C1AD55-4A87-42C0-B245-583C70C4800E}"/>
               </a:ext>
             </a:extLst>
           </p:cNvPr>
@@ -15230,7 +15230,7 @@
           <p:cNvPr id="6" name="">
             <a:extLst xmlns:a="http://schemas.openxmlformats.org/drawingml/2006/main">
               <a:ext uri="{FF2B5EF4-FFF2-40B4-BE49-F238E27FC236}">
-                <a16:creationId xmlns:a16="http://schemas.microsoft.com/office/drawing/2014/main" id="{65BC78A3-7143-4715-BAC8-F750BD318168}"/>
+                <a16:creationId xmlns:a16="http://schemas.microsoft.com/office/drawing/2014/main" id="{D701D3A7-AADF-4DF2-AEC9-9AA814732CF7}"/>
               </a:ext>
             </a:extLst>
           </p:cNvPr>
@@ -15384,7 +15384,7 @@
     </p:spTree>
     <p:extLst>
       <p:ext uri="{BB962C8B-B14F-4D97-AF65-F5344CB8AC3E}">
-        <p14:creationId xmlns:p14="http://schemas.microsoft.com/office/powerpoint/2010/main" val="1494035503"/>
+        <p14:creationId xmlns:p14="http://schemas.microsoft.com/office/powerpoint/2010/main" val="1785156666"/>
       </p:ext>
     </p:extLst>
   </p:cSld>
@@ -15415,7 +15415,7 @@
           <p:cNvPr id="2" name="">
             <a:extLst xmlns:a="http://schemas.openxmlformats.org/drawingml/2006/main">
               <a:ext uri="{FF2B5EF4-FFF2-40B4-BE49-F238E27FC236}">
-                <a16:creationId xmlns:a16="http://schemas.microsoft.com/office/drawing/2014/main" id="{47B43A41-1844-49F9-95B0-3BDC46BDBC84}"/>
+                <a16:creationId xmlns:a16="http://schemas.microsoft.com/office/drawing/2014/main" id="{CFA08628-7F49-4A18-84B9-9F24D8CDF651}"/>
               </a:ext>
             </a:extLst>
           </p:cNvPr>
@@ -15571,7 +15571,7 @@
           <p:cNvPr id="3" name="">
             <a:extLst xmlns:a="http://schemas.openxmlformats.org/drawingml/2006/main">
               <a:ext uri="{FF2B5EF4-FFF2-40B4-BE49-F238E27FC236}">
-                <a16:creationId xmlns:a16="http://schemas.microsoft.com/office/drawing/2014/main" id="{AAC8A683-3E0B-4D61-89BF-14652B731010}"/>
+                <a16:creationId xmlns:a16="http://schemas.microsoft.com/office/drawing/2014/main" id="{E270F551-4A95-45FE-B7A8-5503D2E89EF9}"/>
               </a:ext>
             </a:extLst>
           </p:cNvPr>
@@ -15727,7 +15727,7 @@
           <p:cNvPr id="4" name="">
             <a:extLst xmlns:a="http://schemas.openxmlformats.org/drawingml/2006/main">
               <a:ext uri="{FF2B5EF4-FFF2-40B4-BE49-F238E27FC236}">
-                <a16:creationId xmlns:a16="http://schemas.microsoft.com/office/drawing/2014/main" id="{5FC6722D-C780-4BCA-9650-2E68D3BEF001}"/>
+                <a16:creationId xmlns:a16="http://schemas.microsoft.com/office/drawing/2014/main" id="{B594156A-5419-4665-AFC0-379320515E5C}"/>
               </a:ext>
             </a:extLst>
           </p:cNvPr>
@@ -15883,7 +15883,7 @@
           <p:cNvPr id="5" name="Chart">
             <a:extLst xmlns:a="http://schemas.openxmlformats.org/drawingml/2006/main">
               <a:ext uri="{FF2B5EF4-FFF2-40B4-BE49-F238E27FC236}">
-                <a16:creationId xmlns:a16="http://schemas.microsoft.com/office/drawing/2014/main" id="{DB25AE8D-F870-4E57-826C-0C5A6021E119}"/>
+                <a16:creationId xmlns:a16="http://schemas.microsoft.com/office/drawing/2014/main" id="{8E950B5C-D11B-4C07-93EF-73F1DD9C45FC}"/>
               </a:ext>
             </a:extLst>
           </p:cNvPr>
@@ -15896,7 +15896,7 @@
         </p:xfrm>
         <a:graphic xmlns:a="http://schemas.openxmlformats.org/drawingml/2006/main">
           <a:graphicData uri="http://schemas.openxmlformats.org/drawingml/2006/chart">
-            <c:chart xmlns:r="http://schemas.openxmlformats.org/officeDocument/2006/relationships" xmlns:c="http://schemas.openxmlformats.org/drawingml/2006/chart" r:id="Raeef79a1a0334cac"/>
+            <c:chart xmlns:r="http://schemas.openxmlformats.org/officeDocument/2006/relationships" xmlns:c="http://schemas.openxmlformats.org/drawingml/2006/chart" r:id="Rd2a6572e06ba4bc3"/>
           </a:graphicData>
         </a:graphic>
       </p:graphicFrame>
@@ -15905,7 +15905,7 @@
           <p:cNvPr id="6" name="">
             <a:extLst xmlns:a="http://schemas.openxmlformats.org/drawingml/2006/main">
               <a:ext uri="{FF2B5EF4-FFF2-40B4-BE49-F238E27FC236}">
-                <a16:creationId xmlns:a16="http://schemas.microsoft.com/office/drawing/2014/main" id="{9ABDAB9A-D4CC-4334-A41E-31617D229573}"/>
+                <a16:creationId xmlns:a16="http://schemas.microsoft.com/office/drawing/2014/main" id="{8F413D33-A0E0-4379-9FAE-541BDD9B89D0}"/>
               </a:ext>
             </a:extLst>
           </p:cNvPr>
@@ -16082,7 +16082,7 @@
     </p:spTree>
     <p:extLst>
       <p:ext uri="{BB962C8B-B14F-4D97-AF65-F5344CB8AC3E}">
-        <p14:creationId xmlns:p14="http://schemas.microsoft.com/office/powerpoint/2010/main" val="1672821449"/>
+        <p14:creationId xmlns:p14="http://schemas.microsoft.com/office/powerpoint/2010/main" val="1505523578"/>
       </p:ext>
     </p:extLst>
   </p:cSld>
@@ -16113,7 +16113,7 @@
           <p:cNvPr id="2" name="">
             <a:extLst xmlns:a="http://schemas.openxmlformats.org/drawingml/2006/main">
               <a:ext uri="{FF2B5EF4-FFF2-40B4-BE49-F238E27FC236}">
-                <a16:creationId xmlns:a16="http://schemas.microsoft.com/office/drawing/2014/main" id="{370CEABF-6DB9-4A49-B4AB-7E1AD59CA287}"/>
+                <a16:creationId xmlns:a16="http://schemas.microsoft.com/office/drawing/2014/main" id="{28D14AE0-BDB8-46C1-8148-0A1906E2F720}"/>
               </a:ext>
             </a:extLst>
           </p:cNvPr>
@@ -16269,7 +16269,7 @@
           <p:cNvPr id="3" name="">
             <a:extLst xmlns:a="http://schemas.openxmlformats.org/drawingml/2006/main">
               <a:ext uri="{FF2B5EF4-FFF2-40B4-BE49-F238E27FC236}">
-                <a16:creationId xmlns:a16="http://schemas.microsoft.com/office/drawing/2014/main" id="{7AEE6BC7-0F67-404E-9B33-347ACC1B02C4}"/>
+                <a16:creationId xmlns:a16="http://schemas.microsoft.com/office/drawing/2014/main" id="{AFB849AC-D0E3-4DB3-988D-E497F0EBD539}"/>
               </a:ext>
             </a:extLst>
           </p:cNvPr>
@@ -16425,7 +16425,7 @@
           <p:cNvPr id="4" name="">
             <a:extLst xmlns:a="http://schemas.openxmlformats.org/drawingml/2006/main">
               <a:ext uri="{FF2B5EF4-FFF2-40B4-BE49-F238E27FC236}">
-                <a16:creationId xmlns:a16="http://schemas.microsoft.com/office/drawing/2014/main" id="{40E5B7D1-1453-41D9-B7D8-486EA5C98965}"/>
+                <a16:creationId xmlns:a16="http://schemas.microsoft.com/office/drawing/2014/main" id="{48394E20-314A-4D8D-BB25-91F68F4A7E18}"/>
               </a:ext>
             </a:extLst>
           </p:cNvPr>
@@ -16581,7 +16581,7 @@
           <p:cNvPr id="5" name="">
             <a:extLst xmlns:a="http://schemas.openxmlformats.org/drawingml/2006/main">
               <a:ext uri="{FF2B5EF4-FFF2-40B4-BE49-F238E27FC236}">
-                <a16:creationId xmlns:a16="http://schemas.microsoft.com/office/drawing/2014/main" id="{91927F6D-7FA0-42C6-8D18-B50D3C4E1041}"/>
+                <a16:creationId xmlns:a16="http://schemas.microsoft.com/office/drawing/2014/main" id="{D26C9A17-C8FD-4896-8C98-859835C49C49}"/>
               </a:ext>
             </a:extLst>
           </p:cNvPr>
@@ -16749,7 +16749,7 @@
                           <a:ea typeface="Arial"/>
                           <a:cs typeface="Arial"/>
                         </a:rPr>
-                        <a:t>55 passed, 4 subtests passed in 6.20s</a:t>
+                        <a:t>55 passed, 4 subtests passed in 8.31s</a:t>
                       </a:r>
                     </a:p>
                   </a:txBody>
@@ -17179,7 +17179,7 @@
     </p:spTree>
     <p:extLst>
       <p:ext uri="{BB962C8B-B14F-4D97-AF65-F5344CB8AC3E}">
-        <p14:creationId xmlns:p14="http://schemas.microsoft.com/office/powerpoint/2010/main" val="570450225"/>
+        <p14:creationId xmlns:p14="http://schemas.microsoft.com/office/powerpoint/2010/main" val="230199420"/>
       </p:ext>
     </p:extLst>
   </p:cSld>
@@ -17210,7 +17210,7 @@
           <p:cNvPr id="2" name="">
             <a:extLst xmlns:a="http://schemas.openxmlformats.org/drawingml/2006/main">
               <a:ext uri="{FF2B5EF4-FFF2-40B4-BE49-F238E27FC236}">
-                <a16:creationId xmlns:a16="http://schemas.microsoft.com/office/drawing/2014/main" id="{9A95442D-3668-4945-8D32-186429524DFA}"/>
+                <a16:creationId xmlns:a16="http://schemas.microsoft.com/office/drawing/2014/main" id="{584B1D77-6BC8-40E0-BE9F-10B91205F599}"/>
               </a:ext>
             </a:extLst>
           </p:cNvPr>
@@ -17240,7 +17240,7 @@
           <p:cNvPr id="3" name="">
             <a:extLst xmlns:a="http://schemas.openxmlformats.org/drawingml/2006/main">
               <a:ext uri="{FF2B5EF4-FFF2-40B4-BE49-F238E27FC236}">
-                <a16:creationId xmlns:a16="http://schemas.microsoft.com/office/drawing/2014/main" id="{F2D70713-5161-4460-8809-E2EF4CD814C2}"/>
+                <a16:creationId xmlns:a16="http://schemas.microsoft.com/office/drawing/2014/main" id="{B7B1B6FC-3F18-485C-8F7B-46B834E8568A}"/>
               </a:ext>
             </a:extLst>
           </p:cNvPr>
@@ -17270,7 +17270,7 @@
           <p:cNvPr id="4" name="">
             <a:extLst xmlns:a="http://schemas.openxmlformats.org/drawingml/2006/main">
               <a:ext uri="{FF2B5EF4-FFF2-40B4-BE49-F238E27FC236}">
-                <a16:creationId xmlns:a16="http://schemas.microsoft.com/office/drawing/2014/main" id="{BA9C43A8-97D8-40B9-8431-B202897ECD1E}"/>
+                <a16:creationId xmlns:a16="http://schemas.microsoft.com/office/drawing/2014/main" id="{B64313E3-2AE0-400E-9201-0252352569DA}"/>
               </a:ext>
             </a:extLst>
           </p:cNvPr>
@@ -17303,7 +17303,7 @@
           <p:cNvPr id="5" name="">
             <a:extLst xmlns:a="http://schemas.openxmlformats.org/drawingml/2006/main">
               <a:ext uri="{FF2B5EF4-FFF2-40B4-BE49-F238E27FC236}">
-                <a16:creationId xmlns:a16="http://schemas.microsoft.com/office/drawing/2014/main" id="{70B65CBE-9A9B-4406-B740-1E2747265989}"/>
+                <a16:creationId xmlns:a16="http://schemas.microsoft.com/office/drawing/2014/main" id="{64C2CA48-C609-43F3-A22B-DDE2D75B7E3D}"/>
               </a:ext>
             </a:extLst>
           </p:cNvPr>
@@ -17333,7 +17333,7 @@
           <p:cNvPr id="6" name="">
             <a:extLst xmlns:a="http://schemas.openxmlformats.org/drawingml/2006/main">
               <a:ext uri="{FF2B5EF4-FFF2-40B4-BE49-F238E27FC236}">
-                <a16:creationId xmlns:a16="http://schemas.microsoft.com/office/drawing/2014/main" id="{80461F3A-1E9C-4A7C-8A45-EBE3AE3AC277}"/>
+                <a16:creationId xmlns:a16="http://schemas.microsoft.com/office/drawing/2014/main" id="{2FCE8CFA-EDF9-4CEA-BCAB-1073C65DC7E0}"/>
               </a:ext>
             </a:extLst>
           </p:cNvPr>
@@ -17363,7 +17363,7 @@
           <p:cNvPr id="7" name="">
             <a:extLst xmlns:a="http://schemas.openxmlformats.org/drawingml/2006/main">
               <a:ext uri="{FF2B5EF4-FFF2-40B4-BE49-F238E27FC236}">
-                <a16:creationId xmlns:a16="http://schemas.microsoft.com/office/drawing/2014/main" id="{E349D474-4506-4C8C-8791-687C7BC30D22}"/>
+                <a16:creationId xmlns:a16="http://schemas.microsoft.com/office/drawing/2014/main" id="{3F42B319-9991-4D0C-AD10-6CA445547EDE}"/>
               </a:ext>
             </a:extLst>
           </p:cNvPr>
@@ -17519,7 +17519,7 @@
           <p:cNvPr id="8" name="">
             <a:extLst xmlns:a="http://schemas.openxmlformats.org/drawingml/2006/main">
               <a:ext uri="{FF2B5EF4-FFF2-40B4-BE49-F238E27FC236}">
-                <a16:creationId xmlns:a16="http://schemas.microsoft.com/office/drawing/2014/main" id="{676071EA-4AB9-4243-95AD-A86C688C6C65}"/>
+                <a16:creationId xmlns:a16="http://schemas.microsoft.com/office/drawing/2014/main" id="{3FE1A539-80C4-4AD2-B43D-9DF12DE4FC96}"/>
               </a:ext>
             </a:extLst>
           </p:cNvPr>
@@ -17675,7 +17675,7 @@
           <p:cNvPr id="9" name="">
             <a:extLst xmlns:a="http://schemas.openxmlformats.org/drawingml/2006/main">
               <a:ext uri="{FF2B5EF4-FFF2-40B4-BE49-F238E27FC236}">
-                <a16:creationId xmlns:a16="http://schemas.microsoft.com/office/drawing/2014/main" id="{C7C0D61D-7D16-4298-BA79-6886FC1900A2}"/>
+                <a16:creationId xmlns:a16="http://schemas.microsoft.com/office/drawing/2014/main" id="{554ABEFF-ED8F-492F-87C6-237BA3D8BEE1}"/>
               </a:ext>
             </a:extLst>
           </p:cNvPr>
@@ -17831,7 +17831,7 @@
           <p:cNvPr id="10" name="">
             <a:extLst xmlns:a="http://schemas.openxmlformats.org/drawingml/2006/main">
               <a:ext uri="{FF2B5EF4-FFF2-40B4-BE49-F238E27FC236}">
-                <a16:creationId xmlns:a16="http://schemas.microsoft.com/office/drawing/2014/main" id="{FF92D5DC-8F56-478A-A973-F45F5AA24FB0}"/>
+                <a16:creationId xmlns:a16="http://schemas.microsoft.com/office/drawing/2014/main" id="{82EC0420-80A9-4C99-8C24-C96B6EFBA8AF}"/>
               </a:ext>
             </a:extLst>
           </p:cNvPr>
@@ -17987,7 +17987,7 @@
           <p:cNvPr id="11" name="">
             <a:extLst xmlns:a="http://schemas.openxmlformats.org/drawingml/2006/main">
               <a:ext uri="{FF2B5EF4-FFF2-40B4-BE49-F238E27FC236}">
-                <a16:creationId xmlns:a16="http://schemas.microsoft.com/office/drawing/2014/main" id="{4857C4CA-73F6-45E6-A1A9-3DFE5E3E8219}"/>
+                <a16:creationId xmlns:a16="http://schemas.microsoft.com/office/drawing/2014/main" id="{6B48F764-8CD7-465D-9872-82178843CECD}"/>
               </a:ext>
             </a:extLst>
           </p:cNvPr>
@@ -18147,7 +18147,7 @@
           <p:cNvPr id="12" name="">
             <a:extLst xmlns:a="http://schemas.openxmlformats.org/drawingml/2006/main">
               <a:ext uri="{FF2B5EF4-FFF2-40B4-BE49-F238E27FC236}">
-                <a16:creationId xmlns:a16="http://schemas.microsoft.com/office/drawing/2014/main" id="{C7B0B18D-78EF-47C6-A372-D615A393D170}"/>
+                <a16:creationId xmlns:a16="http://schemas.microsoft.com/office/drawing/2014/main" id="{E0127D0D-93C9-4BBF-AC64-B4D4C42DF8F1}"/>
               </a:ext>
             </a:extLst>
           </p:cNvPr>
@@ -18307,7 +18307,7 @@
           <p:cNvPr id="13" name="">
             <a:extLst xmlns:a="http://schemas.openxmlformats.org/drawingml/2006/main">
               <a:ext uri="{FF2B5EF4-FFF2-40B4-BE49-F238E27FC236}">
-                <a16:creationId xmlns:a16="http://schemas.microsoft.com/office/drawing/2014/main" id="{8F47D9D8-AA48-481F-B9EF-DFEAF2FEA309}"/>
+                <a16:creationId xmlns:a16="http://schemas.microsoft.com/office/drawing/2014/main" id="{0CA975BC-BB2A-4889-A8E8-D4D69E85CD03}"/>
               </a:ext>
             </a:extLst>
           </p:cNvPr>
@@ -18467,7 +18467,7 @@
           <p:cNvPr id="14" name="">
             <a:extLst xmlns:a="http://schemas.openxmlformats.org/drawingml/2006/main">
               <a:ext uri="{FF2B5EF4-FFF2-40B4-BE49-F238E27FC236}">
-                <a16:creationId xmlns:a16="http://schemas.microsoft.com/office/drawing/2014/main" id="{FBA42907-354C-4872-8374-0093D18CDF0F}"/>
+                <a16:creationId xmlns:a16="http://schemas.microsoft.com/office/drawing/2014/main" id="{60428D32-97BB-4541-8893-9B41DD1F9B15}"/>
               </a:ext>
             </a:extLst>
           </p:cNvPr>
@@ -18627,7 +18627,7 @@
           <p:cNvPr id="15" name="">
             <a:extLst xmlns:a="http://schemas.openxmlformats.org/drawingml/2006/main">
               <a:ext uri="{FF2B5EF4-FFF2-40B4-BE49-F238E27FC236}">
-                <a16:creationId xmlns:a16="http://schemas.microsoft.com/office/drawing/2014/main" id="{07538AB3-D87F-46B2-8E8E-7CD89C9E9C52}"/>
+                <a16:creationId xmlns:a16="http://schemas.microsoft.com/office/drawing/2014/main" id="{A6C62ECE-8213-4CE1-A1C7-A7D335FD0D06}"/>
               </a:ext>
             </a:extLst>
           </p:cNvPr>
@@ -18787,7 +18787,7 @@
           <p:cNvPr id="16" name="">
             <a:extLst xmlns:a="http://schemas.openxmlformats.org/drawingml/2006/main">
               <a:ext uri="{FF2B5EF4-FFF2-40B4-BE49-F238E27FC236}">
-                <a16:creationId xmlns:a16="http://schemas.microsoft.com/office/drawing/2014/main" id="{E279234E-631E-4481-AF66-E5E04ACF5293}"/>
+                <a16:creationId xmlns:a16="http://schemas.microsoft.com/office/drawing/2014/main" id="{68841197-5BE4-47C8-A6E6-F29134CFC0F0}"/>
               </a:ext>
             </a:extLst>
           </p:cNvPr>
@@ -18945,7 +18945,7 @@
     </p:spTree>
     <p:extLst>
       <p:ext uri="{BB962C8B-B14F-4D97-AF65-F5344CB8AC3E}">
-        <p14:creationId xmlns:p14="http://schemas.microsoft.com/office/powerpoint/2010/main" val="2136057341"/>
+        <p14:creationId xmlns:p14="http://schemas.microsoft.com/office/powerpoint/2010/main" val="1129470598"/>
       </p:ext>
     </p:extLst>
   </p:cSld>
@@ -18976,7 +18976,7 @@
           <p:cNvPr id="2" name="">
             <a:extLst xmlns:a="http://schemas.openxmlformats.org/drawingml/2006/main">
               <a:ext uri="{FF2B5EF4-FFF2-40B4-BE49-F238E27FC236}">
-                <a16:creationId xmlns:a16="http://schemas.microsoft.com/office/drawing/2014/main" id="{25289ABD-D847-45E1-BDE2-01059358DDAC}"/>
+                <a16:creationId xmlns:a16="http://schemas.microsoft.com/office/drawing/2014/main" id="{90D728C0-0B13-4D90-9F9D-1B756798ADDD}"/>
               </a:ext>
             </a:extLst>
           </p:cNvPr>
@@ -19132,7 +19132,7 @@
           <p:cNvPr id="3" name="">
             <a:extLst xmlns:a="http://schemas.openxmlformats.org/drawingml/2006/main">
               <a:ext uri="{FF2B5EF4-FFF2-40B4-BE49-F238E27FC236}">
-                <a16:creationId xmlns:a16="http://schemas.microsoft.com/office/drawing/2014/main" id="{EEE24715-FD2F-4669-A377-CF6D56118143}"/>
+                <a16:creationId xmlns:a16="http://schemas.microsoft.com/office/drawing/2014/main" id="{2247FDD7-A31D-4C6A-BCA1-86F346674557}"/>
               </a:ext>
             </a:extLst>
           </p:cNvPr>
@@ -19288,7 +19288,7 @@
           <p:cNvPr id="4" name="">
             <a:extLst xmlns:a="http://schemas.openxmlformats.org/drawingml/2006/main">
               <a:ext uri="{FF2B5EF4-FFF2-40B4-BE49-F238E27FC236}">
-                <a16:creationId xmlns:a16="http://schemas.microsoft.com/office/drawing/2014/main" id="{FEDEE90F-7575-4453-AC35-D98CEAB73A15}"/>
+                <a16:creationId xmlns:a16="http://schemas.microsoft.com/office/drawing/2014/main" id="{2FCB35B6-C716-4DA7-822C-5C2D65E61C9B}"/>
               </a:ext>
             </a:extLst>
           </p:cNvPr>
@@ -19444,7 +19444,7 @@
           <p:cNvPr id="5" name="">
             <a:extLst xmlns:a="http://schemas.openxmlformats.org/drawingml/2006/main">
               <a:ext uri="{FF2B5EF4-FFF2-40B4-BE49-F238E27FC236}">
-                <a16:creationId xmlns:a16="http://schemas.microsoft.com/office/drawing/2014/main" id="{3CECF3CD-2B04-4797-B470-9ACB2E73ACE1}"/>
+                <a16:creationId xmlns:a16="http://schemas.microsoft.com/office/drawing/2014/main" id="{D9C07B22-25A3-43B4-A847-05694448CEE3}"/>
               </a:ext>
             </a:extLst>
           </p:cNvPr>
@@ -19600,7 +19600,7 @@
           <p:cNvPr id="6" name="">
             <a:extLst xmlns:a="http://schemas.openxmlformats.org/drawingml/2006/main">
               <a:ext uri="{FF2B5EF4-FFF2-40B4-BE49-F238E27FC236}">
-                <a16:creationId xmlns:a16="http://schemas.microsoft.com/office/drawing/2014/main" id="{F0A6AFA8-40A6-4770-8A3A-016AF45F7EB5}"/>
+                <a16:creationId xmlns:a16="http://schemas.microsoft.com/office/drawing/2014/main" id="{389EEA75-D06E-41D3-8FDF-036D03771B20}"/>
               </a:ext>
             </a:extLst>
           </p:cNvPr>
@@ -19756,7 +19756,7 @@
           <p:cNvPr id="7" name="">
             <a:extLst xmlns:a="http://schemas.openxmlformats.org/drawingml/2006/main">
               <a:ext uri="{FF2B5EF4-FFF2-40B4-BE49-F238E27FC236}">
-                <a16:creationId xmlns:a16="http://schemas.microsoft.com/office/drawing/2014/main" id="{9614B54C-2771-458C-ADD3-BF6D336282F8}"/>
+                <a16:creationId xmlns:a16="http://schemas.microsoft.com/office/drawing/2014/main" id="{77BA4BF1-D7B5-442D-984D-B507ACAD333E}"/>
               </a:ext>
             </a:extLst>
           </p:cNvPr>
@@ -19912,7 +19912,7 @@
           <p:cNvPr id="8" name="">
             <a:extLst xmlns:a="http://schemas.openxmlformats.org/drawingml/2006/main">
               <a:ext uri="{FF2B5EF4-FFF2-40B4-BE49-F238E27FC236}">
-                <a16:creationId xmlns:a16="http://schemas.microsoft.com/office/drawing/2014/main" id="{5E4E9208-E7D7-48F7-BDEB-C22980C483EB}"/>
+                <a16:creationId xmlns:a16="http://schemas.microsoft.com/office/drawing/2014/main" id="{060ACE0F-5184-4606-B7D5-5DCEB29717AA}"/>
               </a:ext>
             </a:extLst>
           </p:cNvPr>
@@ -20066,7 +20066,7 @@
     </p:spTree>
     <p:extLst>
       <p:ext uri="{BB962C8B-B14F-4D97-AF65-F5344CB8AC3E}">
-        <p14:creationId xmlns:p14="http://schemas.microsoft.com/office/powerpoint/2010/main" val="2125898621"/>
+        <p14:creationId xmlns:p14="http://schemas.microsoft.com/office/powerpoint/2010/main" val="612401120"/>
       </p:ext>
     </p:extLst>
   </p:cSld>
@@ -20097,7 +20097,7 @@
           <p:cNvPr id="2" name="">
             <a:extLst xmlns:a="http://schemas.openxmlformats.org/drawingml/2006/main">
               <a:ext uri="{FF2B5EF4-FFF2-40B4-BE49-F238E27FC236}">
-                <a16:creationId xmlns:a16="http://schemas.microsoft.com/office/drawing/2014/main" id="{57269A5D-E811-4C4E-BBBA-652026656813}"/>
+                <a16:creationId xmlns:a16="http://schemas.microsoft.com/office/drawing/2014/main" id="{4A94C110-C178-4E3E-A28C-B0A20FECC7DD}"/>
               </a:ext>
             </a:extLst>
           </p:cNvPr>
@@ -20253,7 +20253,7 @@
           <p:cNvPr id="3" name="">
             <a:extLst xmlns:a="http://schemas.openxmlformats.org/drawingml/2006/main">
               <a:ext uri="{FF2B5EF4-FFF2-40B4-BE49-F238E27FC236}">
-                <a16:creationId xmlns:a16="http://schemas.microsoft.com/office/drawing/2014/main" id="{09AA2325-B8B4-41C3-8388-80327ACEB2BD}"/>
+                <a16:creationId xmlns:a16="http://schemas.microsoft.com/office/drawing/2014/main" id="{DF559CEC-2B2B-4E2D-B9BE-A0C2CFB14F77}"/>
               </a:ext>
             </a:extLst>
           </p:cNvPr>
@@ -20409,7 +20409,7 @@
           <p:cNvPr id="4" name="">
             <a:extLst xmlns:a="http://schemas.openxmlformats.org/drawingml/2006/main">
               <a:ext uri="{FF2B5EF4-FFF2-40B4-BE49-F238E27FC236}">
-                <a16:creationId xmlns:a16="http://schemas.microsoft.com/office/drawing/2014/main" id="{FFBA2261-E7A3-49F8-B360-BFA2CF40A5D9}"/>
+                <a16:creationId xmlns:a16="http://schemas.microsoft.com/office/drawing/2014/main" id="{7E7C03C5-84D7-4C15-BBB9-0B9E5587964C}"/>
               </a:ext>
             </a:extLst>
           </p:cNvPr>
@@ -20565,7 +20565,7 @@
           <p:cNvPr id="5" name="">
             <a:extLst xmlns:a="http://schemas.openxmlformats.org/drawingml/2006/main">
               <a:ext uri="{FF2B5EF4-FFF2-40B4-BE49-F238E27FC236}">
-                <a16:creationId xmlns:a16="http://schemas.microsoft.com/office/drawing/2014/main" id="{EE149ACB-D06B-435B-9AD9-5054DC99888C}"/>
+                <a16:creationId xmlns:a16="http://schemas.microsoft.com/office/drawing/2014/main" id="{BE01EBE1-A5AE-4F02-9A3C-8DC884ACC48B}"/>
               </a:ext>
             </a:extLst>
           </p:cNvPr>
@@ -21308,7 +21308,7 @@
           <p:cNvPr id="6" name="">
             <a:extLst xmlns:a="http://schemas.openxmlformats.org/drawingml/2006/main">
               <a:ext uri="{FF2B5EF4-FFF2-40B4-BE49-F238E27FC236}">
-                <a16:creationId xmlns:a16="http://schemas.microsoft.com/office/drawing/2014/main" id="{89DEC61A-214E-473C-AD53-8FC79365D088}"/>
+                <a16:creationId xmlns:a16="http://schemas.microsoft.com/office/drawing/2014/main" id="{3CA8CEB9-9E39-4BCC-8A73-015A99C68B18}"/>
               </a:ext>
             </a:extLst>
           </p:cNvPr>
@@ -21462,7 +21462,7 @@
     </p:spTree>
     <p:extLst>
       <p:ext uri="{BB962C8B-B14F-4D97-AF65-F5344CB8AC3E}">
-        <p14:creationId xmlns:p14="http://schemas.microsoft.com/office/powerpoint/2010/main" val="894415810"/>
+        <p14:creationId xmlns:p14="http://schemas.microsoft.com/office/powerpoint/2010/main" val="774842700"/>
       </p:ext>
     </p:extLst>
   </p:cSld>
@@ -21493,7 +21493,7 @@
           <p:cNvPr id="2" name="">
             <a:extLst xmlns:a="http://schemas.openxmlformats.org/drawingml/2006/main">
               <a:ext uri="{FF2B5EF4-FFF2-40B4-BE49-F238E27FC236}">
-                <a16:creationId xmlns:a16="http://schemas.microsoft.com/office/drawing/2014/main" id="{8E958EF1-B6BB-4280-BA7A-DEEA1C7B4EC6}"/>
+                <a16:creationId xmlns:a16="http://schemas.microsoft.com/office/drawing/2014/main" id="{3E8E05CF-DC52-4452-A142-62CE4B890282}"/>
               </a:ext>
             </a:extLst>
           </p:cNvPr>
@@ -21649,7 +21649,7 @@
           <p:cNvPr id="3" name="">
             <a:extLst xmlns:a="http://schemas.openxmlformats.org/drawingml/2006/main">
               <a:ext uri="{FF2B5EF4-FFF2-40B4-BE49-F238E27FC236}">
-                <a16:creationId xmlns:a16="http://schemas.microsoft.com/office/drawing/2014/main" id="{5FBB88FF-C873-4980-8F88-BF4547E6C3FA}"/>
+                <a16:creationId xmlns:a16="http://schemas.microsoft.com/office/drawing/2014/main" id="{9EAB558B-2FFB-4424-9DAF-68E04F028E32}"/>
               </a:ext>
             </a:extLst>
           </p:cNvPr>
@@ -21805,7 +21805,7 @@
           <p:cNvPr id="4" name="">
             <a:extLst xmlns:a="http://schemas.openxmlformats.org/drawingml/2006/main">
               <a:ext uri="{FF2B5EF4-FFF2-40B4-BE49-F238E27FC236}">
-                <a16:creationId xmlns:a16="http://schemas.microsoft.com/office/drawing/2014/main" id="{4BA8E748-712E-4D6A-AF20-64191760FC42}"/>
+                <a16:creationId xmlns:a16="http://schemas.microsoft.com/office/drawing/2014/main" id="{36235AFC-7661-4759-8273-0FAE398E9377}"/>
               </a:ext>
             </a:extLst>
           </p:cNvPr>
@@ -21961,7 +21961,7 @@
           <p:cNvPr id="5" name="">
             <a:extLst xmlns:a="http://schemas.openxmlformats.org/drawingml/2006/main">
               <a:ext uri="{FF2B5EF4-FFF2-40B4-BE49-F238E27FC236}">
-                <a16:creationId xmlns:a16="http://schemas.microsoft.com/office/drawing/2014/main" id="{21B345FE-D970-4B88-A634-94A98D4E0B35}"/>
+                <a16:creationId xmlns:a16="http://schemas.microsoft.com/office/drawing/2014/main" id="{65882A46-E023-4695-8C2A-E7486D44FF25}"/>
               </a:ext>
             </a:extLst>
           </p:cNvPr>
@@ -22117,7 +22117,7 @@
           <p:cNvPr id="6" name="">
             <a:extLst xmlns:a="http://schemas.openxmlformats.org/drawingml/2006/main">
               <a:ext uri="{FF2B5EF4-FFF2-40B4-BE49-F238E27FC236}">
-                <a16:creationId xmlns:a16="http://schemas.microsoft.com/office/drawing/2014/main" id="{5D10A309-5408-4091-8E4D-A49C209AE79B}"/>
+                <a16:creationId xmlns:a16="http://schemas.microsoft.com/office/drawing/2014/main" id="{5DBB7593-C493-4CA4-91E6-3D519B59D342}"/>
               </a:ext>
             </a:extLst>
           </p:cNvPr>
@@ -22273,7 +22273,7 @@
           <p:cNvPr id="7" name="">
             <a:extLst xmlns:a="http://schemas.openxmlformats.org/drawingml/2006/main">
               <a:ext uri="{FF2B5EF4-FFF2-40B4-BE49-F238E27FC236}">
-                <a16:creationId xmlns:a16="http://schemas.microsoft.com/office/drawing/2014/main" id="{6F6702E8-EBD4-41E5-B16A-B27B44326532}"/>
+                <a16:creationId xmlns:a16="http://schemas.microsoft.com/office/drawing/2014/main" id="{F78D4E52-8590-48D7-8EA1-54F42B9284CA}"/>
               </a:ext>
             </a:extLst>
           </p:cNvPr>
@@ -22429,7 +22429,7 @@
           <p:cNvPr id="8" name="">
             <a:extLst xmlns:a="http://schemas.openxmlformats.org/drawingml/2006/main">
               <a:ext uri="{FF2B5EF4-FFF2-40B4-BE49-F238E27FC236}">
-                <a16:creationId xmlns:a16="http://schemas.microsoft.com/office/drawing/2014/main" id="{0EA90135-DD42-4A65-A16F-FF2D5E757901}"/>
+                <a16:creationId xmlns:a16="http://schemas.microsoft.com/office/drawing/2014/main" id="{61D0DAB6-B123-4E61-B69F-169992AD4434}"/>
               </a:ext>
             </a:extLst>
           </p:cNvPr>
@@ -22583,7 +22583,7 @@
     </p:spTree>
     <p:extLst>
       <p:ext uri="{BB962C8B-B14F-4D97-AF65-F5344CB8AC3E}">
-        <p14:creationId xmlns:p14="http://schemas.microsoft.com/office/powerpoint/2010/main" val="2138653033"/>
+        <p14:creationId xmlns:p14="http://schemas.microsoft.com/office/powerpoint/2010/main" val="471298274"/>
       </p:ext>
     </p:extLst>
   </p:cSld>
@@ -22614,7 +22614,7 @@
           <p:cNvPr id="2" name="">
             <a:extLst xmlns:a="http://schemas.openxmlformats.org/drawingml/2006/main">
               <a:ext uri="{FF2B5EF4-FFF2-40B4-BE49-F238E27FC236}">
-                <a16:creationId xmlns:a16="http://schemas.microsoft.com/office/drawing/2014/main" id="{06A97D3C-6861-4AAA-8E6C-E935AE8B3E28}"/>
+                <a16:creationId xmlns:a16="http://schemas.microsoft.com/office/drawing/2014/main" id="{4FAA2B9E-9D39-47B2-8839-24903E3E66E5}"/>
               </a:ext>
             </a:extLst>
           </p:cNvPr>
@@ -22770,7 +22770,7 @@
           <p:cNvPr id="3" name="">
             <a:extLst xmlns:a="http://schemas.openxmlformats.org/drawingml/2006/main">
               <a:ext uri="{FF2B5EF4-FFF2-40B4-BE49-F238E27FC236}">
-                <a16:creationId xmlns:a16="http://schemas.microsoft.com/office/drawing/2014/main" id="{FBB1763E-7D0B-488E-8911-3477387D4BF5}"/>
+                <a16:creationId xmlns:a16="http://schemas.microsoft.com/office/drawing/2014/main" id="{FF990553-DF96-4AC8-9229-907CC79EBFEA}"/>
               </a:ext>
             </a:extLst>
           </p:cNvPr>
@@ -22926,7 +22926,7 @@
           <p:cNvPr id="4" name="">
             <a:extLst xmlns:a="http://schemas.openxmlformats.org/drawingml/2006/main">
               <a:ext uri="{FF2B5EF4-FFF2-40B4-BE49-F238E27FC236}">
-                <a16:creationId xmlns:a16="http://schemas.microsoft.com/office/drawing/2014/main" id="{887D5C0A-4C39-4D3A-AEC5-EDB30DE5B874}"/>
+                <a16:creationId xmlns:a16="http://schemas.microsoft.com/office/drawing/2014/main" id="{E1D56A2C-1061-4D82-A423-A3AE7B5CBE37}"/>
               </a:ext>
             </a:extLst>
           </p:cNvPr>
@@ -23082,7 +23082,7 @@
           <p:cNvPr id="5" name="">
             <a:extLst xmlns:a="http://schemas.openxmlformats.org/drawingml/2006/main">
               <a:ext uri="{FF2B5EF4-FFF2-40B4-BE49-F238E27FC236}">
-                <a16:creationId xmlns:a16="http://schemas.microsoft.com/office/drawing/2014/main" id="{F7345BC2-79EB-493F-88AB-85C0C37E11F8}"/>
+                <a16:creationId xmlns:a16="http://schemas.microsoft.com/office/drawing/2014/main" id="{52CE3FD7-2E39-455C-95FA-ECF2AF64BE65}"/>
               </a:ext>
             </a:extLst>
           </p:cNvPr>
@@ -23238,7 +23238,7 @@
           <p:cNvPr id="6" name="">
             <a:extLst xmlns:a="http://schemas.openxmlformats.org/drawingml/2006/main">
               <a:ext uri="{FF2B5EF4-FFF2-40B4-BE49-F238E27FC236}">
-                <a16:creationId xmlns:a16="http://schemas.microsoft.com/office/drawing/2014/main" id="{479650DA-4D24-4723-B5A5-B02FDF52F556}"/>
+                <a16:creationId xmlns:a16="http://schemas.microsoft.com/office/drawing/2014/main" id="{05B38CED-7567-4B2E-BB0A-3882625D31CF}"/>
               </a:ext>
             </a:extLst>
           </p:cNvPr>
@@ -23394,7 +23394,7 @@
           <p:cNvPr id="7" name="">
             <a:extLst xmlns:a="http://schemas.openxmlformats.org/drawingml/2006/main">
               <a:ext uri="{FF2B5EF4-FFF2-40B4-BE49-F238E27FC236}">
-                <a16:creationId xmlns:a16="http://schemas.microsoft.com/office/drawing/2014/main" id="{8B536513-A488-440D-A980-8E0D901AD681}"/>
+                <a16:creationId xmlns:a16="http://schemas.microsoft.com/office/drawing/2014/main" id="{2AD1B1A2-FE0E-41CE-AB8B-6218FA6EBA34}"/>
               </a:ext>
             </a:extLst>
           </p:cNvPr>
@@ -23550,7 +23550,7 @@
           <p:cNvPr id="8" name="">
             <a:extLst xmlns:a="http://schemas.openxmlformats.org/drawingml/2006/main">
               <a:ext uri="{FF2B5EF4-FFF2-40B4-BE49-F238E27FC236}">
-                <a16:creationId xmlns:a16="http://schemas.microsoft.com/office/drawing/2014/main" id="{322F7DD3-AFD5-4FCD-A17C-207C478FD13D}"/>
+                <a16:creationId xmlns:a16="http://schemas.microsoft.com/office/drawing/2014/main" id="{C374E6C1-648C-4677-A3C1-7EF33EE1D8C8}"/>
               </a:ext>
             </a:extLst>
           </p:cNvPr>
@@ -23704,7 +23704,7 @@
     </p:spTree>
     <p:extLst>
       <p:ext uri="{BB962C8B-B14F-4D97-AF65-F5344CB8AC3E}">
-        <p14:creationId xmlns:p14="http://schemas.microsoft.com/office/powerpoint/2010/main" val="1635229013"/>
+        <p14:creationId xmlns:p14="http://schemas.microsoft.com/office/powerpoint/2010/main" val="1996157320"/>
       </p:ext>
     </p:extLst>
   </p:cSld>
@@ -23735,7 +23735,7 @@
           <p:cNvPr id="2" name="">
             <a:extLst xmlns:a="http://schemas.openxmlformats.org/drawingml/2006/main">
               <a:ext uri="{FF2B5EF4-FFF2-40B4-BE49-F238E27FC236}">
-                <a16:creationId xmlns:a16="http://schemas.microsoft.com/office/drawing/2014/main" id="{915C0BDD-DF50-4723-A7D0-710788E210C5}"/>
+                <a16:creationId xmlns:a16="http://schemas.microsoft.com/office/drawing/2014/main" id="{EC0DD9D8-B348-4561-AE5D-90B01F9D31D7}"/>
               </a:ext>
             </a:extLst>
           </p:cNvPr>
@@ -23891,7 +23891,7 @@
           <p:cNvPr id="3" name="">
             <a:extLst xmlns:a="http://schemas.openxmlformats.org/drawingml/2006/main">
               <a:ext uri="{FF2B5EF4-FFF2-40B4-BE49-F238E27FC236}">
-                <a16:creationId xmlns:a16="http://schemas.microsoft.com/office/drawing/2014/main" id="{2F9544A4-8268-4881-82FF-E48EA03B2A06}"/>
+                <a16:creationId xmlns:a16="http://schemas.microsoft.com/office/drawing/2014/main" id="{E3C25828-D6AA-4650-B1D9-05C6FDA03628}"/>
               </a:ext>
             </a:extLst>
           </p:cNvPr>
@@ -24047,7 +24047,7 @@
           <p:cNvPr id="4" name="">
             <a:extLst xmlns:a="http://schemas.openxmlformats.org/drawingml/2006/main">
               <a:ext uri="{FF2B5EF4-FFF2-40B4-BE49-F238E27FC236}">
-                <a16:creationId xmlns:a16="http://schemas.microsoft.com/office/drawing/2014/main" id="{AF56944D-8558-4AC4-8C9C-E1E2A1DD4539}"/>
+                <a16:creationId xmlns:a16="http://schemas.microsoft.com/office/drawing/2014/main" id="{D2F09499-404B-45C2-B877-042EC6855FCA}"/>
               </a:ext>
             </a:extLst>
           </p:cNvPr>
@@ -24203,7 +24203,7 @@
           <p:cNvPr id="5" name="">
             <a:extLst xmlns:a="http://schemas.openxmlformats.org/drawingml/2006/main">
               <a:ext uri="{FF2B5EF4-FFF2-40B4-BE49-F238E27FC236}">
-                <a16:creationId xmlns:a16="http://schemas.microsoft.com/office/drawing/2014/main" id="{13BBA538-5293-472F-A581-85220B2DD343}"/>
+                <a16:creationId xmlns:a16="http://schemas.microsoft.com/office/drawing/2014/main" id="{3F442612-2C4C-47AC-A224-174E8E5EB4CB}"/>
               </a:ext>
             </a:extLst>
           </p:cNvPr>
@@ -24944,7 +24944,7 @@
     </p:spTree>
     <p:extLst>
       <p:ext uri="{BB962C8B-B14F-4D97-AF65-F5344CB8AC3E}">
-        <p14:creationId xmlns:p14="http://schemas.microsoft.com/office/powerpoint/2010/main" val="1657884920"/>
+        <p14:creationId xmlns:p14="http://schemas.microsoft.com/office/powerpoint/2010/main" val="613297820"/>
       </p:ext>
     </p:extLst>
   </p:cSld>
@@ -24975,7 +24975,7 @@
           <p:cNvPr id="2" name="">
             <a:extLst xmlns:a="http://schemas.openxmlformats.org/drawingml/2006/main">
               <a:ext uri="{FF2B5EF4-FFF2-40B4-BE49-F238E27FC236}">
-                <a16:creationId xmlns:a16="http://schemas.microsoft.com/office/drawing/2014/main" id="{0D1239EC-C2A8-4069-8BB4-C28863A5956B}"/>
+                <a16:creationId xmlns:a16="http://schemas.microsoft.com/office/drawing/2014/main" id="{DF635589-B66B-4B1E-AA63-513B440B1D0B}"/>
               </a:ext>
             </a:extLst>
           </p:cNvPr>
@@ -25131,7 +25131,7 @@
           <p:cNvPr id="3" name="">
             <a:extLst xmlns:a="http://schemas.openxmlformats.org/drawingml/2006/main">
               <a:ext uri="{FF2B5EF4-FFF2-40B4-BE49-F238E27FC236}">
-                <a16:creationId xmlns:a16="http://schemas.microsoft.com/office/drawing/2014/main" id="{C5368283-4C0A-4DED-B53A-253E4356D156}"/>
+                <a16:creationId xmlns:a16="http://schemas.microsoft.com/office/drawing/2014/main" id="{46083EE9-42CA-406B-BF05-00E05335A741}"/>
               </a:ext>
             </a:extLst>
           </p:cNvPr>
@@ -25287,7 +25287,7 @@
           <p:cNvPr id="4" name="">
             <a:extLst xmlns:a="http://schemas.openxmlformats.org/drawingml/2006/main">
               <a:ext uri="{FF2B5EF4-FFF2-40B4-BE49-F238E27FC236}">
-                <a16:creationId xmlns:a16="http://schemas.microsoft.com/office/drawing/2014/main" id="{6395DE9C-C71C-4F03-9BC6-1CDC8DAF8421}"/>
+                <a16:creationId xmlns:a16="http://schemas.microsoft.com/office/drawing/2014/main" id="{F84E810C-CEDD-4A7C-9BF6-60B120EF2F65}"/>
               </a:ext>
             </a:extLst>
           </p:cNvPr>
@@ -25443,7 +25443,7 @@
           <p:cNvPr id="5" name="Chart">
             <a:extLst xmlns:a="http://schemas.openxmlformats.org/drawingml/2006/main">
               <a:ext uri="{FF2B5EF4-FFF2-40B4-BE49-F238E27FC236}">
-                <a16:creationId xmlns:a16="http://schemas.microsoft.com/office/drawing/2014/main" id="{76F5BB19-7BB2-45F9-AD14-B60CEF3158E6}"/>
+                <a16:creationId xmlns:a16="http://schemas.microsoft.com/office/drawing/2014/main" id="{1C27B5DF-DF25-45E2-BDCC-965C5DEF3111}"/>
               </a:ext>
             </a:extLst>
           </p:cNvPr>
@@ -25456,7 +25456,7 @@
         </p:xfrm>
         <a:graphic xmlns:a="http://schemas.openxmlformats.org/drawingml/2006/main">
           <a:graphicData uri="http://schemas.openxmlformats.org/drawingml/2006/chart">
-            <c:chart xmlns:r="http://schemas.openxmlformats.org/officeDocument/2006/relationships" xmlns:c="http://schemas.openxmlformats.org/drawingml/2006/chart" r:id="Rfbacae931e08412a"/>
+            <c:chart xmlns:r="http://schemas.openxmlformats.org/officeDocument/2006/relationships" xmlns:c="http://schemas.openxmlformats.org/drawingml/2006/chart" r:id="R8df8ed3e4bcb4d61"/>
           </a:graphicData>
         </a:graphic>
       </p:graphicFrame>
@@ -25465,7 +25465,7 @@
           <p:cNvPr id="6" name="">
             <a:extLst xmlns:a="http://schemas.openxmlformats.org/drawingml/2006/main">
               <a:ext uri="{FF2B5EF4-FFF2-40B4-BE49-F238E27FC236}">
-                <a16:creationId xmlns:a16="http://schemas.microsoft.com/office/drawing/2014/main" id="{861D107B-CAA7-4679-A4FB-9353DF1F6C3F}"/>
+                <a16:creationId xmlns:a16="http://schemas.microsoft.com/office/drawing/2014/main" id="{CBE2B6A6-431C-4DC9-8D18-37609791AB94}"/>
               </a:ext>
             </a:extLst>
           </p:cNvPr>
@@ -25642,7 +25642,7 @@
     </p:spTree>
     <p:extLst>
       <p:ext uri="{BB962C8B-B14F-4D97-AF65-F5344CB8AC3E}">
-        <p14:creationId xmlns:p14="http://schemas.microsoft.com/office/powerpoint/2010/main" val="872167008"/>
+        <p14:creationId xmlns:p14="http://schemas.microsoft.com/office/powerpoint/2010/main" val="992022994"/>
       </p:ext>
     </p:extLst>
   </p:cSld>
@@ -25673,7 +25673,7 @@
           <p:cNvPr id="2" name="">
             <a:extLst xmlns:a="http://schemas.openxmlformats.org/drawingml/2006/main">
               <a:ext uri="{FF2B5EF4-FFF2-40B4-BE49-F238E27FC236}">
-                <a16:creationId xmlns:a16="http://schemas.microsoft.com/office/drawing/2014/main" id="{1B94B47A-E052-4846-88CF-563F74D148B8}"/>
+                <a16:creationId xmlns:a16="http://schemas.microsoft.com/office/drawing/2014/main" id="{0A7D93E1-CA46-42BC-A435-5BCC465C66BE}"/>
               </a:ext>
             </a:extLst>
           </p:cNvPr>
@@ -25829,7 +25829,7 @@
           <p:cNvPr id="3" name="">
             <a:extLst xmlns:a="http://schemas.openxmlformats.org/drawingml/2006/main">
               <a:ext uri="{FF2B5EF4-FFF2-40B4-BE49-F238E27FC236}">
-                <a16:creationId xmlns:a16="http://schemas.microsoft.com/office/drawing/2014/main" id="{2962C1C1-5AED-435D-8757-99D082CC3A55}"/>
+                <a16:creationId xmlns:a16="http://schemas.microsoft.com/office/drawing/2014/main" id="{42845A6F-1FFA-410D-8C83-799538CC03FF}"/>
               </a:ext>
             </a:extLst>
           </p:cNvPr>
@@ -25985,7 +25985,7 @@
           <p:cNvPr id="4" name="">
             <a:extLst xmlns:a="http://schemas.openxmlformats.org/drawingml/2006/main">
               <a:ext uri="{FF2B5EF4-FFF2-40B4-BE49-F238E27FC236}">
-                <a16:creationId xmlns:a16="http://schemas.microsoft.com/office/drawing/2014/main" id="{09570174-DCF6-4545-9A8B-F65E7FFA9CAF}"/>
+                <a16:creationId xmlns:a16="http://schemas.microsoft.com/office/drawing/2014/main" id="{D51AF0C7-C023-4F6B-AA87-1A05FE546CFD}"/>
               </a:ext>
             </a:extLst>
           </p:cNvPr>
@@ -26141,7 +26141,7 @@
           <p:cNvPr id="5" name="Chart">
             <a:extLst xmlns:a="http://schemas.openxmlformats.org/drawingml/2006/main">
               <a:ext uri="{FF2B5EF4-FFF2-40B4-BE49-F238E27FC236}">
-                <a16:creationId xmlns:a16="http://schemas.microsoft.com/office/drawing/2014/main" id="{08230187-6580-4C94-9D95-F060B941AAE7}"/>
+                <a16:creationId xmlns:a16="http://schemas.microsoft.com/office/drawing/2014/main" id="{87C600AA-E2C2-47F0-9808-CD7EC556C092}"/>
               </a:ext>
             </a:extLst>
           </p:cNvPr>
@@ -26154,7 +26154,7 @@
         </p:xfrm>
         <a:graphic xmlns:a="http://schemas.openxmlformats.org/drawingml/2006/main">
           <a:graphicData uri="http://schemas.openxmlformats.org/drawingml/2006/chart">
-            <c:chart xmlns:r="http://schemas.openxmlformats.org/officeDocument/2006/relationships" xmlns:c="http://schemas.openxmlformats.org/drawingml/2006/chart" r:id="R27d57016475b4ae3"/>
+            <c:chart xmlns:r="http://schemas.openxmlformats.org/officeDocument/2006/relationships" xmlns:c="http://schemas.openxmlformats.org/drawingml/2006/chart" r:id="R3f1ad935386e4d4b"/>
           </a:graphicData>
         </a:graphic>
       </p:graphicFrame>
@@ -26163,7 +26163,7 @@
           <p:cNvPr id="6" name="">
             <a:extLst xmlns:a="http://schemas.openxmlformats.org/drawingml/2006/main">
               <a:ext uri="{FF2B5EF4-FFF2-40B4-BE49-F238E27FC236}">
-                <a16:creationId xmlns:a16="http://schemas.microsoft.com/office/drawing/2014/main" id="{DA45650F-A25B-4B51-A14F-4FD36B51D1A9}"/>
+                <a16:creationId xmlns:a16="http://schemas.microsoft.com/office/drawing/2014/main" id="{072490AF-2744-43F1-86B6-D701A585F752}"/>
               </a:ext>
             </a:extLst>
           </p:cNvPr>
@@ -26340,7 +26340,7 @@
     </p:spTree>
     <p:extLst>
       <p:ext uri="{BB962C8B-B14F-4D97-AF65-F5344CB8AC3E}">
-        <p14:creationId xmlns:p14="http://schemas.microsoft.com/office/powerpoint/2010/main" val="865997252"/>
+        <p14:creationId xmlns:p14="http://schemas.microsoft.com/office/powerpoint/2010/main" val="446990857"/>
       </p:ext>
     </p:extLst>
   </p:cSld>
@@ -26371,7 +26371,7 @@
           <p:cNvPr id="2" name="">
             <a:extLst xmlns:a="http://schemas.openxmlformats.org/drawingml/2006/main">
               <a:ext uri="{FF2B5EF4-FFF2-40B4-BE49-F238E27FC236}">
-                <a16:creationId xmlns:a16="http://schemas.microsoft.com/office/drawing/2014/main" id="{A85FC44C-1D7B-4A3E-8F27-222EF784CF4D}"/>
+                <a16:creationId xmlns:a16="http://schemas.microsoft.com/office/drawing/2014/main" id="{B26DFDE0-8D8E-48CC-8E8D-42578BB67C0D}"/>
               </a:ext>
             </a:extLst>
           </p:cNvPr>
@@ -26527,7 +26527,7 @@
           <p:cNvPr id="3" name="">
             <a:extLst xmlns:a="http://schemas.openxmlformats.org/drawingml/2006/main">
               <a:ext uri="{FF2B5EF4-FFF2-40B4-BE49-F238E27FC236}">
-                <a16:creationId xmlns:a16="http://schemas.microsoft.com/office/drawing/2014/main" id="{94F3C475-EE40-4113-AEFB-8B46E0D25271}"/>
+                <a16:creationId xmlns:a16="http://schemas.microsoft.com/office/drawing/2014/main" id="{9BD3817C-1158-4054-B468-6BC1B8F5EAED}"/>
               </a:ext>
             </a:extLst>
           </p:cNvPr>
@@ -26683,7 +26683,7 @@
           <p:cNvPr id="4" name="">
             <a:extLst xmlns:a="http://schemas.openxmlformats.org/drawingml/2006/main">
               <a:ext uri="{FF2B5EF4-FFF2-40B4-BE49-F238E27FC236}">
-                <a16:creationId xmlns:a16="http://schemas.microsoft.com/office/drawing/2014/main" id="{B9B1FE8A-60E1-480C-B9EF-D7C3579EAA7E}"/>
+                <a16:creationId xmlns:a16="http://schemas.microsoft.com/office/drawing/2014/main" id="{0BBCB69C-305C-4A2D-A090-BECAC5D32476}"/>
               </a:ext>
             </a:extLst>
           </p:cNvPr>
@@ -26839,7 +26839,7 @@
           <p:cNvPr id="5" name="">
             <a:extLst xmlns:a="http://schemas.openxmlformats.org/drawingml/2006/main">
               <a:ext uri="{FF2B5EF4-FFF2-40B4-BE49-F238E27FC236}">
-                <a16:creationId xmlns:a16="http://schemas.microsoft.com/office/drawing/2014/main" id="{909EBE1F-721F-4390-83B6-1E30404DE034}"/>
+                <a16:creationId xmlns:a16="http://schemas.microsoft.com/office/drawing/2014/main" id="{CB4EA29C-0C93-43F4-8FC8-19523CE102FC}"/>
               </a:ext>
             </a:extLst>
           </p:cNvPr>
@@ -28028,7 +28028,7 @@
           <p:cNvPr id="6" name="">
             <a:extLst xmlns:a="http://schemas.openxmlformats.org/drawingml/2006/main">
               <a:ext uri="{FF2B5EF4-FFF2-40B4-BE49-F238E27FC236}">
-                <a16:creationId xmlns:a16="http://schemas.microsoft.com/office/drawing/2014/main" id="{A99967A8-FC22-45FC-B47B-D634E207FA48}"/>
+                <a16:creationId xmlns:a16="http://schemas.microsoft.com/office/drawing/2014/main" id="{9DE8F56A-4E45-47A5-A689-012E8F9DCE3B}"/>
               </a:ext>
             </a:extLst>
           </p:cNvPr>
@@ -28205,7 +28205,7 @@
     </p:spTree>
     <p:extLst>
       <p:ext uri="{BB962C8B-B14F-4D97-AF65-F5344CB8AC3E}">
-        <p14:creationId xmlns:p14="http://schemas.microsoft.com/office/powerpoint/2010/main" val="904955498"/>
+        <p14:creationId xmlns:p14="http://schemas.microsoft.com/office/powerpoint/2010/main" val="562257919"/>
       </p:ext>
     </p:extLst>
   </p:cSld>
